--- a/lecons/F2/04_F2_M1_PW02_Population_Densities_in_Cameroon.pptx
+++ b/lecons/F2/04_F2_M1_PW02_Population_Densities_in_Cameroon.pptx
@@ -56,10 +56,9 @@
     <p:sldId id="304" r:id="rId50"/>
     <p:sldId id="305" r:id="rId51"/>
     <p:sldId id="306" r:id="rId52"/>
-    <p:sldId id="307" r:id="rId53"/>
   </p:sldIdLst>
   <p:notesMasterIdLst>
-    <p:notesMasterId r:id="rId54"/>
+    <p:notesMasterId r:id="rId53"/>
   </p:notesMasterIdLst>
   <p:sldSz cx="12192000" cy="6858000"/>
   <p:notesSz cx="6858000" cy="12192000"/>
@@ -641,7 +640,7 @@
           <a:p>
             <a:r>
               <a:rPr lang="en-US" dirty="0"/>
-              <a:t>Listen carefully to this situation from real life. The Ministry wants to build new schools where many people live. It gives the class the population and area of four regions and asks which region is the most crowded. Think about it, because I am going to ask you some questions.</a:t>
+              <a:t>Listen carefully to this situation from real life. The Ministry wants to build new schools where many people live. It gives the class the population and the area of the regions of Cameroon and asks: "Which regions are the most crowded, and which are almost empty?" Think about it, because I am going to ask you some questions.</a:t>
             </a:r>
             <a:endParaRPr lang="en-US" dirty="0"/>
           </a:p>
@@ -817,7 +816,7 @@
           <a:p>
             <a:r>
               <a:rPr lang="en-US" dirty="0"/>
-              <a:t>Good. We must find the most crowded region.</a:t>
+              <a:t>Good. The class must find the most crowded and the emptiest regions.</a:t>
             </a:r>
             <a:endParaRPr lang="en-US" dirty="0"/>
           </a:p>
@@ -1609,7 +1608,7 @@
           <a:p>
             <a:r>
               <a:rPr lang="en-US" dirty="0"/>
-              <a:t>Here is the question for Activity 1: Give the formula of population density and its unit. Take one minute to think and write your answer in your rough notebook.</a:t>
+              <a:t>Here is the question for Activity 1: What is the formula of population density? Take one minute to think and write your answer in your rough notebook.</a:t>
             </a:r>
             <a:endParaRPr lang="en-US" dirty="0"/>
           </a:p>
@@ -1785,7 +1784,7 @@
           <a:p>
             <a:r>
               <a:rPr lang="en-US" dirty="0"/>
-              <a:t>Activity 2. Look carefully at this diagram: the ten regions of Cameroon. Observe every detail before I ask the question.</a:t>
+              <a:t>Activity 2. Look carefully at this diagram: population and area of the regions (approximate). Observe every detail before I ask the question.</a:t>
             </a:r>
             <a:endParaRPr lang="en-US" dirty="0"/>
           </a:p>
@@ -1873,7 +1872,7 @@
           <a:p>
             <a:r>
               <a:rPr lang="en-US" dirty="0"/>
-              <a:t>Here is the question for Activity 2: The West has about 2,000,000 people on 14,000 km². Calculate its density. Take one minute to think and write your answer in your rough notebook.</a:t>
+              <a:t>Here is the question for Activity 2: Calculate the density of the Littoral. Take one minute to think and write your answer in your rough notebook.</a:t>
             </a:r>
             <a:endParaRPr lang="en-US" dirty="0"/>
           </a:p>
@@ -1961,7 +1960,7 @@
           <a:p>
             <a:r>
               <a:rPr lang="en-US" dirty="0"/>
-              <a:t>Let us check the answer together. 2,000,000 ÷ 14,000 ≈ 143 people per km².</a:t>
+              <a:t>Let us check the answer together. 3,850,000 ÷ 20,248 ≈ 190 people per km².</a:t>
             </a:r>
             <a:endParaRPr lang="en-US" dirty="0"/>
           </a:p>
@@ -2049,7 +2048,7 @@
           <a:p>
             <a:r>
               <a:rPr lang="en-US" dirty="0"/>
-              <a:t>Activity 3. Look carefully at this diagram: the East Region. Observe every detail before I ask the question.</a:t>
+              <a:t>Activity 3. Look carefully at this diagram: population and area of the regions (approximate). Observe every detail before I ask the question.</a:t>
             </a:r>
             <a:endParaRPr lang="en-US" dirty="0"/>
           </a:p>
@@ -2137,7 +2136,7 @@
           <a:p>
             <a:r>
               <a:rPr lang="en-US" dirty="0"/>
-              <a:t>Here is the question for Activity 3: The East has about 1,100,000 people on 109,000 km². Calculate its density. Take one minute to think and write your answer in your rough notebook.</a:t>
+              <a:t>Here is the question for Activity 3: Calculate the density of the East. Take one minute to think and write your answer in your rough notebook.</a:t>
             </a:r>
             <a:endParaRPr lang="en-US" dirty="0"/>
           </a:p>
@@ -2225,7 +2224,7 @@
           <a:p>
             <a:r>
               <a:rPr lang="en-US" dirty="0"/>
-              <a:t>Let us check the answer together. 1,100,000 ÷ 109,000 ≈ 10 people per km².</a:t>
+              <a:t>Let us check the answer together. 1,200,000 ÷ 109,002 ≈ 11 people per km².</a:t>
             </a:r>
             <a:endParaRPr lang="en-US" dirty="0"/>
           </a:p>
@@ -2313,7 +2312,7 @@
           <a:p>
             <a:r>
               <a:rPr lang="en-US" dirty="0"/>
-              <a:t>Activity 4. Look carefully at this diagram: the main towns of Cameroon. Observe every detail before I ask the question.</a:t>
+              <a:t>Activity 4. Look carefully at this diagram: density of the regions of Cameroon. Observe every detail before I ask the question.</a:t>
             </a:r>
             <a:endParaRPr lang="en-US" dirty="0"/>
           </a:p>
@@ -2401,7 +2400,7 @@
           <a:p>
             <a:r>
               <a:rPr lang="en-US" dirty="0"/>
-              <a:t>Here is the question for Activity 4: Name two regions of high density and two of low density. Take one minute to think and write your answer in your rough notebook.</a:t>
+              <a:t>Here is the question for Activity 4: Which regions have the darkest colour on this map? Take one minute to think and write your answer in your rough notebook.</a:t>
             </a:r>
             <a:endParaRPr lang="en-US" dirty="0"/>
           </a:p>
@@ -2489,7 +2488,7 @@
           <a:p>
             <a:r>
               <a:rPr lang="en-US" dirty="0"/>
-              <a:t>Our topic is Man in his Environment, and the sub-topic is The World's Population. The key notions we shall use today are: population density, dense, moderate and low density. At the end, you should be able to do this: learners are able to calculate and map the population densities of the regions of Cameroon.</a:t>
+              <a:t>Our topic is Man in his Environment, and the sub-topic is The World's Population. The key notions we shall use today are: population density; dense, moderate and low density. At the end, you should be able to do this: learners are able to calculate and map the population densities of the regions of Cameroon.</a:t>
             </a:r>
             <a:endParaRPr lang="en-US" dirty="0"/>
           </a:p>
@@ -2577,7 +2576,7 @@
           <a:p>
             <a:r>
               <a:rPr lang="en-US" dirty="0"/>
-              <a:t>Let us check the answer together. High: West and Littoral (also North-West, Far North). Low: East and South (also Adamawa).</a:t>
+              <a:t>Let us check the answer together. The Littoral, the West, the Far North and the North-West: they are the most densely populated.</a:t>
             </a:r>
             <a:endParaRPr lang="en-US" dirty="0"/>
           </a:p>
@@ -3105,7 +3104,7 @@
           <a:p>
             <a:r>
               <a:rPr lang="en-US" dirty="0"/>
-              <a:t>Let us copy Calculation. The density of some regions of Cameroon is calculated as follows. On this slide we have West and Littoral. Write each point on a new line, with the key term first, and explain it in your own words when we revise. When you finish, we go to the next slide.</a:t>
+              <a:t>Let us copy Calculation of Densities. The densities of the regions of Cameroon are calculated as follows (approximate). Copy the point on Littoral on the left, then draw the diagram on the right: population and area of the regions. Give it a title and label it clearly.</a:t>
             </a:r>
             <a:endParaRPr lang="en-US" dirty="0"/>
           </a:p>
@@ -3193,7 +3192,7 @@
           <a:p>
             <a:r>
               <a:rPr lang="en-US" dirty="0"/>
-              <a:t>We continue with Calculation. On this slide we have East. Write each point on a new line, with the key term first, and explain it in your own words when we revise.</a:t>
+              <a:t>We continue with Calculation of Densities. On this slide we have West, North and East. Write each point on a new line, with the key term first, and explain it in your own words when we revise.</a:t>
             </a:r>
             <a:endParaRPr lang="en-US" dirty="0"/>
           </a:p>
@@ -3281,7 +3280,7 @@
           <a:p>
             <a:r>
               <a:rPr lang="en-US" dirty="0"/>
-              <a:t>Let us copy Areas of Density in Cameroon. Cameroon has the following areas of density. On this slide we have High density and Moderate density. Write each point on a new line, with the key term first, and explain it in your own words when we revise. When you finish, we go to the next slide.</a:t>
+              <a:t>Let us copy Areas of Dense, Moderate and Low Density. The map of Cameroon shows the following areas. Copy the point on High density (over 100 per km²) on the left, then draw the diagram on the right: density of the regions of Cameroon. Give it a title and label it clearly.</a:t>
             </a:r>
             <a:endParaRPr lang="en-US" dirty="0"/>
           </a:p>
@@ -3369,7 +3368,7 @@
           <a:p>
             <a:r>
               <a:rPr lang="en-US" dirty="0"/>
-              <a:t>We continue with Areas of Density in Cameroon. On this slide we have Low density. Write each point on a new line, with the key term first, and explain it in your own words when we revise.</a:t>
+              <a:t>We continue with Areas of Dense, Moderate and Low Density. On this slide we have Moderate density (20 to 100 per km²) and Low density (under 20 per km²). Write each point on a new line, with the key term first, and explain it in your own words when we revise.</a:t>
             </a:r>
             <a:endParaRPr lang="en-US" dirty="0"/>
           </a:p>
@@ -3545,7 +3544,7 @@
           <a:p>
             <a:r>
               <a:rPr lang="en-US" dirty="0"/>
-              <a:t>Now draw this illustration in your notebook: the regions of Cameroon. Give it a title and label it clearly.</a:t>
+              <a:t>Now let us check what you have understood. Question 1: A region has 900,000 people on 30,000 km². Find its density. Answer in your exercise book.</a:t>
             </a:r>
             <a:endParaRPr lang="en-US" dirty="0"/>
           </a:p>
@@ -3633,7 +3632,7 @@
           <a:p>
             <a:r>
               <a:rPr lang="en-US" dirty="0"/>
-              <a:t>Now let us check what you have understood. Question 1: A region has 900,000 people on 30,000 km². Find its density. Answer in your exercise book.</a:t>
+              <a:t>The expected answer is: 900,000 ÷ 30,000 = 30 people per km². If you got it right, well done.</a:t>
             </a:r>
             <a:endParaRPr lang="en-US" dirty="0"/>
           </a:p>
@@ -3721,7 +3720,7 @@
           <a:p>
             <a:r>
               <a:rPr lang="en-US" dirty="0"/>
-              <a:t>The expected answer is: 900,000 ÷ 30,000 = 30 people per km². If you got it right, well done.</a:t>
+              <a:t>Now let us check what you have understood. Question 2: Name the region with the lowest density. Answer in your exercise book.</a:t>
             </a:r>
             <a:endParaRPr lang="en-US" dirty="0"/>
           </a:p>
@@ -3809,7 +3808,7 @@
           <a:p>
             <a:r>
               <a:rPr lang="en-US" dirty="0"/>
-              <a:t>Now let us check what you have understood. Question 2: Name the region with the lowest density. Answer in your exercise book.</a:t>
+              <a:t>The expected answer is: the East. If you got it right, well done.</a:t>
             </a:r>
             <a:endParaRPr lang="en-US" dirty="0"/>
           </a:p>
@@ -3897,7 +3896,7 @@
           <a:p>
             <a:r>
               <a:rPr lang="en-US" dirty="0"/>
-              <a:t>The expected answer is: the East. If you got it right, well done.</a:t>
+              <a:t>For those who need more practice, fill in the blanks in your exercise book. The answers are: number 1, high; number 2, low; number 3, km².</a:t>
             </a:r>
             <a:endParaRPr lang="en-US" dirty="0"/>
           </a:p>
@@ -3985,7 +3984,7 @@
           <a:p>
             <a:r>
               <a:rPr lang="en-US" dirty="0"/>
-              <a:t>For those who need more practice, fill in the blanks in your exercise book. The answers are: number 1, high; number 2, low; number 3, km².</a:t>
+              <a:t>For your homework: Calculate the density of the Far North: about 4,450,000 people on 34,263 km². We shall correct it at the beginning of our next lesson.</a:t>
             </a:r>
             <a:endParaRPr lang="en-US" dirty="0"/>
           </a:p>
@@ -4073,7 +4072,7 @@
           <a:p>
             <a:r>
               <a:rPr lang="en-US" dirty="0"/>
-              <a:t>For your homework: Calculate the density of the North Region: about 3,000,000 people on 66,000 km². We shall correct it at the beginning of our next lesson.</a:t>
+              <a:t>Our next lesson will be on Lesson 3: Man in the Equatorial Zone. Thank you for your attention, and see you next time.</a:t>
             </a:r>
             <a:endParaRPr lang="en-US" dirty="0"/>
           </a:p>
@@ -4161,7 +4160,7 @@
           <a:p>
             <a:r>
               <a:rPr lang="en-US" dirty="0"/>
-              <a:t>Our next lesson will be on Lesson 3: Man in the Equatorial Zone. Thank you for your attention, and see you next time.</a:t>
+              <a:t>Let us play the bilingual game. I say a word in English, and you give me the French word. Then we do the reverse.</a:t>
             </a:r>
             <a:endParaRPr lang="en-US" dirty="0"/>
           </a:p>
@@ -4249,7 +4248,7 @@
           <a:p>
             <a:r>
               <a:rPr lang="en-US" dirty="0"/>
-              <a:t>Let us play the bilingual game. I say a word in English, and you give me the French word. Then we do the reverse.</a:t>
+              <a:t>I record this information in the official logbook of the class after the lesson.</a:t>
             </a:r>
             <a:endParaRPr lang="en-US" dirty="0"/>
           </a:p>
@@ -4337,7 +4336,7 @@
           <a:p>
             <a:r>
               <a:rPr lang="en-US" dirty="0"/>
-              <a:t>I record this information in the official logbook of the class after the lesson.</a:t>
+              <a:t>I complete the second page of the logbook: the matter taught, the evaluation, the homework and the attendance.</a:t>
             </a:r>
             <a:endParaRPr lang="en-US" dirty="0"/>
           </a:p>
@@ -4425,7 +4424,7 @@
           <a:p>
             <a:r>
               <a:rPr lang="en-US" dirty="0"/>
-              <a:t>Here is a good answer. Example for the North Region: about 3,000,000 people ÷ 66,000 km² ≈ 45 people per km². Compare it with your own answer and correct your work in red.</a:t>
+              <a:t>Here is a good answer. Example for the North Region: about 2,800,000 people ÷ 66,000 km² ≈ 42 people per km². Compare it with your own answer and correct your work in red.</a:t>
             </a:r>
             <a:endParaRPr lang="en-US" dirty="0"/>
           </a:p>
@@ -4513,7 +4512,7 @@
           <a:p>
             <a:r>
               <a:rPr lang="en-US" dirty="0"/>
-              <a:t>I complete the second page of the logbook: the matter taught, the evaluation, the homework and the attendance.</a:t>
+              <a:t>This slide is for me, the teacher: it gives the timing of the lesson and what to do if the projector is not available.</a:t>
             </a:r>
             <a:endParaRPr lang="en-US" dirty="0"/>
           </a:p>
@@ -4601,7 +4600,7 @@
           <a:p>
             <a:r>
               <a:rPr lang="en-US" dirty="0"/>
-              <a:t>This slide is for me, the teacher: it gives the timing of the lesson and what to do if the projector is not available.</a:t>
+              <a:t>These are the references and picture credits used to prepare this lesson.</a:t>
             </a:r>
             <a:endParaRPr lang="en-US" dirty="0"/>
           </a:p>
@@ -4625,94 +4624,6 @@
             <a:fld id="{F7021451-1387-4CA6-816F-3879F97B5CBC}" type="slidenum">
               <a:rPr lang="en-US"/>
               <a:t>51</a:t>
-            </a:fld>
-            <a:endParaRPr lang="en-US"/>
-          </a:p>
-        </p:txBody>
-      </p:sp>
-    </p:spTree>
-    <p:extLst>
-      <p:ext uri="{BB962C8B-B14F-4D97-AF65-F5344CB8AC3E}">
-        <p14:creationId xmlns:p14="http://schemas.microsoft.com/office/powerpoint/2010/main" val="1024086991"/>
-      </p:ext>
-    </p:extLst>
-  </p:cSld>
-  <p:clrMapOvr>
-    <a:masterClrMapping/>
-  </p:clrMapOvr>
-</p:notes>
-</file>
-
-<file path=ppt/notesSlides/notesSlide52.xml><?xml version="1.0" encoding="utf-8"?>
-<p:notes xmlns:a="http://schemas.openxmlformats.org/drawingml/2006/main" xmlns:r="http://schemas.openxmlformats.org/officeDocument/2006/relationships" xmlns:p="http://schemas.openxmlformats.org/presentationml/2006/main">
-  <p:cSld>
-    <p:spTree>
-      <p:nvGrpSpPr>
-        <p:cNvPr id="1" name=""/>
-        <p:cNvGrpSpPr/>
-        <p:nvPr/>
-      </p:nvGrpSpPr>
-      <p:grpSpPr>
-        <a:xfrm>
-          <a:off x="0" y="0"/>
-          <a:ext cx="0" cy="0"/>
-          <a:chOff x="0" y="0"/>
-          <a:chExt cx="0" cy="0"/>
-        </a:xfrm>
-      </p:grpSpPr>
-      <p:sp>
-        <p:nvSpPr>
-          <p:cNvPr id="2" name="Slide Image Placeholder 1"/>
-          <p:cNvSpPr>
-            <a:spLocks noGrp="1" noRot="1" noChangeAspect="1"/>
-          </p:cNvSpPr>
-          <p:nvPr>
-            <p:ph type="sldImg"/>
-          </p:nvPr>
-        </p:nvSpPr>
-        <p:spPr/>
-      </p:sp>
-      <p:sp>
-        <p:nvSpPr>
-          <p:cNvPr id="3" name="Notes Placeholder 2"/>
-          <p:cNvSpPr>
-            <a:spLocks noGrp="1"/>
-          </p:cNvSpPr>
-          <p:nvPr>
-            <p:ph type="body" idx="1"/>
-          </p:nvPr>
-        </p:nvSpPr>
-        <p:spPr/>
-        <p:txBody>
-          <a:bodyPr/>
-          <a:lstStyle/>
-          <a:p>
-            <a:r>
-              <a:rPr lang="en-US" dirty="0"/>
-              <a:t>These are the references and picture credits used to prepare this lesson.</a:t>
-            </a:r>
-            <a:endParaRPr lang="en-US" dirty="0"/>
-          </a:p>
-        </p:txBody>
-      </p:sp>
-      <p:sp>
-        <p:nvSpPr>
-          <p:cNvPr id="4" name="Slide Number Placeholder 3"/>
-          <p:cNvSpPr>
-            <a:spLocks noGrp="1"/>
-          </p:cNvSpPr>
-          <p:nvPr>
-            <p:ph type="sldNum" sz="quarter" idx="10"/>
-          </p:nvPr>
-        </p:nvSpPr>
-        <p:spPr/>
-        <p:txBody>
-          <a:bodyPr/>
-          <a:lstStyle/>
-          <a:p>
-            <a:fld id="{F7021451-1387-4CA6-816F-3879F97B5CBC}" type="slidenum">
-              <a:rPr lang="en-US"/>
-              <a:t>52</a:t>
             </a:fld>
             <a:endParaRPr lang="en-US"/>
           </a:p>
@@ -4953,7 +4864,7 @@
           <a:p>
             <a:r>
               <a:rPr lang="en-US" dirty="0"/>
-              <a:t>By the end of this lesson, you should be able to do three things. Number 1: recall the notion of population density. Number 2: calculate the density of regions of Cameroon. Number 3: identify areas of dense, moderate and low density on a map.</a:t>
+              <a:t>By the end of this lesson, you should be able to do three things. Number 1: recall the notion of population density. Number 2: calculate the density of the regions of Cameroon. Number 3: identify areas of dense, moderate and low density on a map.</a:t>
             </a:r>
             <a:endParaRPr lang="en-US" dirty="0"/>
           </a:p>
@@ -6421,7 +6332,7 @@
         <p:spPr>
           <a:xfrm>
             <a:off x="0" y="658368"/>
-            <a:ext cx="5120640" cy="5833872"/>
+            <a:ext cx="3840480" cy="5833872"/>
           </a:xfrm>
           <a:prstGeom prst="rect">
             <a:avLst/>
@@ -6436,8 +6347,8 @@
         </p:nvSpPr>
         <p:spPr>
           <a:xfrm>
-            <a:off x="5349240" y="1005840"/>
-            <a:ext cx="6522415" cy="731520"/>
+            <a:off x="4069080" y="1005840"/>
+            <a:ext cx="7802575" cy="731520"/>
           </a:xfrm>
           <a:prstGeom prst="rect">
             <a:avLst/>
@@ -6477,8 +6388,8 @@
         </p:nvSpPr>
         <p:spPr>
           <a:xfrm>
-            <a:off x="5349240" y="1783080"/>
-            <a:ext cx="6522415" cy="4663440"/>
+            <a:off x="4069080" y="1783080"/>
+            <a:ext cx="7802575" cy="4663440"/>
           </a:xfrm>
           <a:prstGeom prst="rect">
             <a:avLst/>
@@ -6505,7 +6416,7 @@
                 <a:ea typeface="Times New Roman" pitchFamily="34" charset="-122"/>
                 <a:cs typeface="Times New Roman" pitchFamily="34" charset="-120"/>
               </a:rPr>
-              <a:t>The Ministry wants to build new schools where many people live. It gives the class the population and area of four regions and asks which region is the most crowded.</a:t>
+              <a:t>The Ministry wants to build new schools where many people live. It gives the class the population and the area of the regions of Cameroon and asks: "Which regions are the most crowded, and which are almost empty?"</a:t>
             </a:r>
             <a:endParaRPr lang="en-US" sz="4000" dirty="0"/>
           </a:p>
@@ -6943,7 +6854,7 @@
                 <a:ea typeface="Times New Roman" pitchFamily="34" charset="-122"/>
                 <a:cs typeface="Times New Roman" pitchFamily="34" charset="-120"/>
               </a:rPr>
-              <a:t>We must find the most crowded region.</a:t>
+              <a:t>The class must find the most crowded and the emptiest regions.</a:t>
             </a:r>
             <a:endParaRPr lang="en-US" sz="4000" dirty="0"/>
           </a:p>
@@ -9285,7 +9196,7 @@
                 <a:ea typeface="Times New Roman" pitchFamily="34" charset="-122"/>
                 <a:cs typeface="Times New Roman" pitchFamily="34" charset="-120"/>
               </a:rPr>
-              <a:t>Give the formula of population density and its unit.</a:t>
+              <a:t>What is the formula of population density?</a:t>
             </a:r>
             <a:endParaRPr lang="en-US" sz="4000" dirty="0"/>
           </a:p>
@@ -9663,7 +9574,7 @@
       </p:sp>
       <p:pic>
         <p:nvPicPr>
-          <p:cNvPr id="4" name="Image 0" descr="/home/claude/f4/img/v2/cmr_regions_big.png">    </p:cNvPr>
+          <p:cNvPr id="4" name="Image 0" descr="/home/claude/f4/img/v2/cmr_popdata_big.png">    </p:cNvPr>
           <p:cNvPicPr>
             <a:picLocks noChangeAspect="1"/>
           </p:cNvPicPr>
@@ -9677,8 +9588,8 @@
         </p:blipFill>
         <p:spPr>
           <a:xfrm>
-            <a:off x="2191621" y="1783080"/>
-            <a:ext cx="7808453" cy="4270248"/>
+            <a:off x="629930" y="1783080"/>
+            <a:ext cx="10931835" cy="4270248"/>
           </a:xfrm>
           <a:prstGeom prst="rect">
             <a:avLst/>
@@ -9718,7 +9629,7 @@
                 <a:ea typeface="Times New Roman" pitchFamily="34" charset="-122"/>
                 <a:cs typeface="Times New Roman" pitchFamily="34" charset="-120"/>
               </a:rPr>
-              <a:t>The ten regions of Cameroon.</a:t>
+              <a:t>Population and area of the regions (approximate).</a:t>
             </a:r>
             <a:endParaRPr lang="en-US" sz="1800" dirty="0"/>
           </a:p>
@@ -9937,7 +9848,7 @@
                 <a:ea typeface="Times New Roman" pitchFamily="34" charset="-122"/>
                 <a:cs typeface="Times New Roman" pitchFamily="34" charset="-120"/>
               </a:rPr>
-              <a:t>The West has about 2,000,000 people on 14,000 km². Calculate its density.</a:t>
+              <a:t>Calculate the density of the Littoral.</a:t>
             </a:r>
             <a:endParaRPr lang="en-US" sz="4000" dirty="0"/>
           </a:p>
@@ -10156,7 +10067,7 @@
                 <a:ea typeface="Times New Roman" pitchFamily="34" charset="-122"/>
                 <a:cs typeface="Times New Roman" pitchFamily="34" charset="-120"/>
               </a:rPr>
-              <a:t>2,000,000 ÷ 14,000 ≈ 143 people per km².</a:t>
+              <a:t>3,850,000 ÷ 20,248 ≈ 190 people per km².</a:t>
             </a:r>
             <a:endParaRPr lang="en-US" sz="4000" dirty="0"/>
           </a:p>
@@ -10315,7 +10226,7 @@
       </p:sp>
       <p:pic>
         <p:nvPicPr>
-          <p:cNvPr id="4" name="Image 0" descr="/home/claude/f4/img/v2/cmr_regions_big.png">    </p:cNvPr>
+          <p:cNvPr id="4" name="Image 0" descr="/home/claude/f4/img/v2/cmr_popdata_big.png">    </p:cNvPr>
           <p:cNvPicPr>
             <a:picLocks noChangeAspect="1"/>
           </p:cNvPicPr>
@@ -10329,8 +10240,8 @@
         </p:blipFill>
         <p:spPr>
           <a:xfrm>
-            <a:off x="2191621" y="1783080"/>
-            <a:ext cx="7808453" cy="4270248"/>
+            <a:off x="629930" y="1783080"/>
+            <a:ext cx="10931835" cy="4270248"/>
           </a:xfrm>
           <a:prstGeom prst="rect">
             <a:avLst/>
@@ -10370,7 +10281,7 @@
                 <a:ea typeface="Times New Roman" pitchFamily="34" charset="-122"/>
                 <a:cs typeface="Times New Roman" pitchFamily="34" charset="-120"/>
               </a:rPr>
-              <a:t>The East Region.</a:t>
+              <a:t>Population and area of the regions (approximate).</a:t>
             </a:r>
             <a:endParaRPr lang="en-US" sz="1800" dirty="0"/>
           </a:p>
@@ -10589,7 +10500,7 @@
                 <a:ea typeface="Times New Roman" pitchFamily="34" charset="-122"/>
                 <a:cs typeface="Times New Roman" pitchFamily="34" charset="-120"/>
               </a:rPr>
-              <a:t>The East has about 1,100,000 people on 109,000 km². Calculate its density.</a:t>
+              <a:t>Calculate the density of the East.</a:t>
             </a:r>
             <a:endParaRPr lang="en-US" sz="4000" dirty="0"/>
           </a:p>
@@ -10808,7 +10719,7 @@
                 <a:ea typeface="Times New Roman" pitchFamily="34" charset="-122"/>
                 <a:cs typeface="Times New Roman" pitchFamily="34" charset="-120"/>
               </a:rPr>
-              <a:t>1,100,000 ÷ 109,000 ≈ 10 people per km².</a:t>
+              <a:t>1,200,000 ÷ 109,002 ≈ 11 people per km².</a:t>
             </a:r>
             <a:endParaRPr lang="en-US" sz="4000" dirty="0"/>
           </a:p>
@@ -10967,7 +10878,7 @@
       </p:sp>
       <p:pic>
         <p:nvPicPr>
-          <p:cNvPr id="4" name="Image 0" descr="/home/claude/f4/img/v2/cmr_towns_big.png">    </p:cNvPr>
+          <p:cNvPr id="4" name="Image 0" descr="/home/claude/f4/img/v2/choropleth_big.png">    </p:cNvPr>
           <p:cNvPicPr>
             <a:picLocks noChangeAspect="1"/>
           </p:cNvPicPr>
@@ -11022,7 +10933,7 @@
                 <a:ea typeface="Times New Roman" pitchFamily="34" charset="-122"/>
                 <a:cs typeface="Times New Roman" pitchFamily="34" charset="-120"/>
               </a:rPr>
-              <a:t>The main towns of Cameroon.</a:t>
+              <a:t>Density of the regions of Cameroon.</a:t>
             </a:r>
             <a:endParaRPr lang="en-US" sz="1800" dirty="0"/>
           </a:p>
@@ -11241,7 +11152,7 @@
                 <a:ea typeface="Times New Roman" pitchFamily="34" charset="-122"/>
                 <a:cs typeface="Times New Roman" pitchFamily="34" charset="-120"/>
               </a:rPr>
-              <a:t>Name two regions of high density and two of low density.</a:t>
+              <a:t>Which regions have the darkest colour on this map?</a:t>
             </a:r>
             <a:endParaRPr lang="en-US" sz="4000" dirty="0"/>
           </a:p>
@@ -11924,7 +11835,7 @@
                           <a:ea typeface="Calibri" pitchFamily="34" charset="-122"/>
                           <a:cs typeface="Calibri" pitchFamily="34" charset="-120"/>
                         </a:rPr>
-                        <a:t>Population density, dense, moderate and low density.</a:t>
+                        <a:t>Population density; dense, moderate and low density.</a:t>
                       </a:r>
                       <a:endParaRPr lang="en-US" sz="1700" dirty="0">
                         <a:latin typeface="Calibri" charset="0"/>
@@ -12062,7 +11973,7 @@
                           <a:ea typeface="Calibri" pitchFamily="34" charset="-122"/>
                           <a:cs typeface="Calibri" pitchFamily="34" charset="-120"/>
                         </a:rPr>
-                        <a:t>Recall of population density; calculation of density for different regions of Cameroon; identifying areas of dense, moderate and low density on a map.</a:t>
+                        <a:t>Theoretical basis: recall of the notion of population density. Practical exercise: calculation of the density for different regions of Cameroon. Contextualisation: identify, from a map of population distribution in Cameroon, areas of dense, moderate and low population densities.</a:t>
                       </a:r>
                       <a:endParaRPr lang="en-US" sz="1700" dirty="0">
                         <a:latin typeface="Calibri" charset="0"/>
@@ -12469,7 +12380,7 @@
                 <a:ea typeface="Times New Roman" pitchFamily="34" charset="-122"/>
                 <a:cs typeface="Times New Roman" pitchFamily="34" charset="-120"/>
               </a:rPr>
-              <a:t>High: West and Littoral (also North-West, Far North). Low: East and South (also Adamawa).</a:t>
+              <a:t>The Littoral, the West, the Far North and the North-West: they are the most densely populated.</a:t>
             </a:r>
             <a:endParaRPr lang="en-US" sz="4000" dirty="0"/>
           </a:p>
@@ -13754,9 +13665,129 @@
           </a:p>
         </p:txBody>
       </p:sp>
+      <p:sp>
+        <p:nvSpPr>
+          <p:cNvPr id="3" name="Text 1"/>
+          <p:cNvSpPr/>
+          <p:nvPr/>
+        </p:nvSpPr>
+        <p:spPr>
+          <a:xfrm>
+            <a:off x="365760" y="1005840"/>
+            <a:ext cx="11460175" cy="731520"/>
+          </a:xfrm>
+          <a:prstGeom prst="rect">
+            <a:avLst/>
+          </a:prstGeom>
+          <a:noFill/>
+          <a:ln/>
+        </p:spPr>
+        <p:txBody>
+          <a:bodyPr wrap="square" lIns="0" tIns="0" rIns="0" bIns="0" rtlCol="0" anchor="ctr">
+            <a:normAutofit/>
+          </a:bodyPr>
+          <a:lstStyle/>
+          <a:p>
+            <a:pPr algn="ctr" indent="0" marL="0">
+              <a:buNone/>
+            </a:pPr>
+            <a:r>
+              <a:rPr lang="en-US" sz="3600" b="1" dirty="0">
+                <a:solidFill>
+                  <a:srgbClr val="990011"/>
+                </a:solidFill>
+                <a:latin typeface="Times New Roman" pitchFamily="34" charset="0"/>
+                <a:ea typeface="Times New Roman" pitchFamily="34" charset="-122"/>
+                <a:cs typeface="Times New Roman" pitchFamily="34" charset="-120"/>
+              </a:rPr>
+              <a:t>1. Calculation of Densities</a:t>
+            </a:r>
+            <a:endParaRPr lang="en-US" sz="3600" dirty="0"/>
+          </a:p>
+        </p:txBody>
+      </p:sp>
+      <p:sp>
+        <p:nvSpPr>
+          <p:cNvPr id="4" name="Text 2"/>
+          <p:cNvSpPr/>
+          <p:nvPr/>
+        </p:nvSpPr>
+        <p:spPr>
+          <a:xfrm>
+            <a:off x="365760" y="1783080"/>
+            <a:ext cx="4846320" cy="4617720"/>
+          </a:xfrm>
+          <a:prstGeom prst="rect">
+            <a:avLst/>
+          </a:prstGeom>
+          <a:noFill/>
+          <a:ln/>
+        </p:spPr>
+        <p:txBody>
+          <a:bodyPr wrap="square" lIns="0" tIns="0" rIns="0" bIns="0" rtlCol="0" anchor="t"/>
+          <a:lstStyle/>
+          <a:p>
+            <a:pPr algn="l" indent="0" marL="0">
+              <a:spcAft>
+                <a:spcPts val="800"/>
+              </a:spcAft>
+              <a:buNone/>
+            </a:pPr>
+            <a:r>
+              <a:rPr lang="en-US" sz="3600" i="1" dirty="0">
+                <a:solidFill>
+                  <a:srgbClr val="111111"/>
+                </a:solidFill>
+                <a:latin typeface="Times New Roman" pitchFamily="34" charset="0"/>
+                <a:ea typeface="Times New Roman" pitchFamily="34" charset="-122"/>
+                <a:cs typeface="Times New Roman" pitchFamily="34" charset="-120"/>
+              </a:rPr>
+              <a:t>The densities of the regions of Cameroon are calculated as follows (approximate):</a:t>
+            </a:r>
+            <a:endParaRPr lang="en-US" sz="3600" dirty="0"/>
+          </a:p>
+          <a:p>
+            <a:pPr algn="l" indent="0" marL="0">
+              <a:spcAft>
+                <a:spcPts val="800"/>
+              </a:spcAft>
+              <a:buNone/>
+            </a:pPr>
+            <a:r>
+              <a:rPr lang="en-US" sz="3600" b="1" dirty="0">
+                <a:solidFill>
+                  <a:srgbClr val="111111"/>
+                </a:solidFill>
+                <a:latin typeface="Times New Roman" pitchFamily="34" charset="0"/>
+                <a:ea typeface="Times New Roman" pitchFamily="34" charset="-122"/>
+                <a:cs typeface="Times New Roman" pitchFamily="34" charset="-120"/>
+              </a:rPr>
+              <a:t>Littoral: </a:t>
+            </a:r>
+            <a:pPr algn="l" indent="0" marL="0">
+              <a:spcAft>
+                <a:spcPts val="800"/>
+              </a:spcAft>
+              <a:buNone/>
+            </a:pPr>
+            <a:r>
+              <a:rPr lang="en-US" sz="3600" dirty="0">
+                <a:solidFill>
+                  <a:srgbClr val="111111"/>
+                </a:solidFill>
+                <a:latin typeface="Times New Roman" pitchFamily="34" charset="0"/>
+                <a:ea typeface="Times New Roman" pitchFamily="34" charset="-122"/>
+                <a:cs typeface="Times New Roman" pitchFamily="34" charset="-120"/>
+              </a:rPr>
+              <a:t>3,850,000 ÷ 20,248 km² ≈ 190 people per km².</a:t>
+            </a:r>
+            <a:endParaRPr lang="en-US" sz="3600" dirty="0"/>
+          </a:p>
+        </p:txBody>
+      </p:sp>
       <p:pic>
         <p:nvPicPr>
-          <p:cNvPr id="3" name="Image 0" descr="/home/claude/f4/img/minesec_sheet.png">    </p:cNvPr>
+          <p:cNvPr id="5" name="Image 0" descr="/home/claude/f4/img/v2/cmr_popdata_big.png">    </p:cNvPr>
           <p:cNvPicPr>
             <a:picLocks noChangeAspect="1"/>
           </p:cNvPicPr>
@@ -13770,8 +13801,8 @@
         </p:blipFill>
         <p:spPr>
           <a:xfrm>
-            <a:off x="0" y="658368"/>
-            <a:ext cx="2468880" cy="5833872"/>
+            <a:off x="5349240" y="2617506"/>
+            <a:ext cx="6659575" cy="2601397"/>
           </a:xfrm>
           <a:prstGeom prst="rect">
             <a:avLst/>
@@ -13780,14 +13811,14 @@
       </p:pic>
       <p:sp>
         <p:nvSpPr>
-          <p:cNvPr id="4" name="Text 1"/>
+          <p:cNvPr id="6" name="Text 3"/>
           <p:cNvSpPr/>
           <p:nvPr/>
         </p:nvSpPr>
         <p:spPr>
           <a:xfrm>
-            <a:off x="2697480" y="1005840"/>
-            <a:ext cx="9174175" cy="731520"/>
+            <a:off x="5349240" y="6089904"/>
+            <a:ext cx="6659575" cy="347472"/>
           </a:xfrm>
           <a:prstGeom prst="rect">
             <a:avLst/>
@@ -13796,142 +13827,24 @@
           <a:ln/>
         </p:spPr>
         <p:txBody>
-          <a:bodyPr wrap="square" lIns="0" tIns="0" rIns="0" bIns="0" rtlCol="0" anchor="ctr">
-            <a:normAutofit/>
-          </a:bodyPr>
+          <a:bodyPr wrap="square" lIns="0" tIns="0" rIns="0" bIns="0" rtlCol="0" anchor="ctr"/>
           <a:lstStyle/>
           <a:p>
             <a:pPr algn="ctr" indent="0" marL="0">
               <a:buNone/>
             </a:pPr>
             <a:r>
-              <a:rPr lang="en-US" sz="3600" b="1" dirty="0">
-                <a:solidFill>
-                  <a:srgbClr val="990011"/>
+              <a:rPr lang="en-US" sz="1600" i="1" dirty="0">
+                <a:solidFill>
+                  <a:srgbClr val="555555"/>
                 </a:solidFill>
                 <a:latin typeface="Times New Roman" pitchFamily="34" charset="0"/>
                 <a:ea typeface="Times New Roman" pitchFamily="34" charset="-122"/>
                 <a:cs typeface="Times New Roman" pitchFamily="34" charset="-120"/>
               </a:rPr>
-              <a:t>1. Calculation</a:t>
-            </a:r>
-            <a:endParaRPr lang="en-US" sz="3600" dirty="0"/>
-          </a:p>
-        </p:txBody>
-      </p:sp>
-      <p:sp>
-        <p:nvSpPr>
-          <p:cNvPr id="5" name="Text 2"/>
-          <p:cNvSpPr/>
-          <p:nvPr/>
-        </p:nvSpPr>
-        <p:spPr>
-          <a:xfrm>
-            <a:off x="2697480" y="1783080"/>
-            <a:ext cx="9174175" cy="4663440"/>
-          </a:xfrm>
-          <a:prstGeom prst="rect">
-            <a:avLst/>
-          </a:prstGeom>
-          <a:noFill/>
-          <a:ln/>
-        </p:spPr>
-        <p:txBody>
-          <a:bodyPr wrap="square" lIns="0" tIns="0" rIns="0" bIns="0" rtlCol="0" anchor="t"/>
-          <a:lstStyle/>
-          <a:p>
-            <a:pPr algn="l" indent="0" marL="0">
-              <a:spcAft>
-                <a:spcPts val="800"/>
-              </a:spcAft>
-              <a:buNone/>
-            </a:pPr>
-            <a:r>
-              <a:rPr lang="en-US" sz="4000" i="1" dirty="0">
-                <a:solidFill>
-                  <a:srgbClr val="111111"/>
-                </a:solidFill>
-                <a:latin typeface="Times New Roman" pitchFamily="34" charset="0"/>
-                <a:ea typeface="Times New Roman" pitchFamily="34" charset="-122"/>
-                <a:cs typeface="Times New Roman" pitchFamily="34" charset="-120"/>
-              </a:rPr>
-              <a:t>The density of some regions of Cameroon is calculated as follows:</a:t>
-            </a:r>
-            <a:endParaRPr lang="en-US" sz="4000" dirty="0"/>
-          </a:p>
-          <a:p>
-            <a:pPr algn="l" indent="0" marL="0">
-              <a:spcAft>
-                <a:spcPts val="800"/>
-              </a:spcAft>
-              <a:buNone/>
-            </a:pPr>
-            <a:r>
-              <a:rPr lang="en-US" sz="4000" b="1" dirty="0">
-                <a:solidFill>
-                  <a:srgbClr val="111111"/>
-                </a:solidFill>
-                <a:latin typeface="Times New Roman" pitchFamily="34" charset="0"/>
-                <a:ea typeface="Times New Roman" pitchFamily="34" charset="-122"/>
-                <a:cs typeface="Times New Roman" pitchFamily="34" charset="-120"/>
-              </a:rPr>
-              <a:t>West: </a:t>
-            </a:r>
-            <a:pPr algn="l" indent="0" marL="0">
-              <a:spcAft>
-                <a:spcPts val="800"/>
-              </a:spcAft>
-              <a:buNone/>
-            </a:pPr>
-            <a:r>
-              <a:rPr lang="en-US" sz="4000" dirty="0">
-                <a:solidFill>
-                  <a:srgbClr val="111111"/>
-                </a:solidFill>
-                <a:latin typeface="Times New Roman" pitchFamily="34" charset="0"/>
-                <a:ea typeface="Times New Roman" pitchFamily="34" charset="-122"/>
-                <a:cs typeface="Times New Roman" pitchFamily="34" charset="-120"/>
-              </a:rPr>
-              <a:t>About 2,000,000 ÷ 14,000 km² ≈ 143 people per km² (high density).</a:t>
-            </a:r>
-            <a:endParaRPr lang="en-US" sz="4000" dirty="0"/>
-          </a:p>
-          <a:p>
-            <a:pPr algn="l" indent="0" marL="0">
-              <a:spcAft>
-                <a:spcPts val="800"/>
-              </a:spcAft>
-              <a:buNone/>
-            </a:pPr>
-            <a:r>
-              <a:rPr lang="en-US" sz="4000" b="1" dirty="0">
-                <a:solidFill>
-                  <a:srgbClr val="111111"/>
-                </a:solidFill>
-                <a:latin typeface="Times New Roman" pitchFamily="34" charset="0"/>
-                <a:ea typeface="Times New Roman" pitchFamily="34" charset="-122"/>
-                <a:cs typeface="Times New Roman" pitchFamily="34" charset="-120"/>
-              </a:rPr>
-              <a:t>Littoral: </a:t>
-            </a:r>
-            <a:pPr algn="l" indent="0" marL="0">
-              <a:spcAft>
-                <a:spcPts val="800"/>
-              </a:spcAft>
-              <a:buNone/>
-            </a:pPr>
-            <a:r>
-              <a:rPr lang="en-US" sz="4000" dirty="0">
-                <a:solidFill>
-                  <a:srgbClr val="111111"/>
-                </a:solidFill>
-                <a:latin typeface="Times New Roman" pitchFamily="34" charset="0"/>
-                <a:ea typeface="Times New Roman" pitchFamily="34" charset="-122"/>
-                <a:cs typeface="Times New Roman" pitchFamily="34" charset="-120"/>
-              </a:rPr>
-              <a:t>About 3,500,000 ÷ 20,000 km² ≈ 175 people per km² (high density).</a:t>
-            </a:r>
-            <a:endParaRPr lang="en-US" sz="4000" dirty="0"/>
+              <a:t>Illustration: population and area of the regions</a:t>
+            </a:r>
+            <a:endParaRPr lang="en-US" sz="1600" dirty="0"/>
           </a:p>
         </p:txBody>
       </p:sp>
@@ -14106,7 +14019,7 @@
                 <a:ea typeface="Times New Roman" pitchFamily="34" charset="-122"/>
                 <a:cs typeface="Times New Roman" pitchFamily="34" charset="-120"/>
               </a:rPr>
-              <a:t>1. Calculation (continued)</a:t>
+              <a:t>1. Calculation of Densities</a:t>
             </a:r>
             <a:endParaRPr lang="en-US" sz="3600" dirty="0"/>
           </a:p>
@@ -14148,7 +14061,7 @@
                 <a:ea typeface="Times New Roman" pitchFamily="34" charset="-122"/>
                 <a:cs typeface="Times New Roman" pitchFamily="34" charset="-120"/>
               </a:rPr>
-              <a:t>East: </a:t>
+              <a:t>West: </a:t>
             </a:r>
             <a:pPr algn="l" indent="0" marL="0">
               <a:spcAft>
@@ -14165,7 +14078,81 @@
                 <a:ea typeface="Times New Roman" pitchFamily="34" charset="-122"/>
                 <a:cs typeface="Times New Roman" pitchFamily="34" charset="-120"/>
               </a:rPr>
-              <a:t>About 1,100,000 ÷ 109,000 km² ≈ 10 people per km² (low density).</a:t>
+              <a:t>2,080,000 ÷ 13,892 km² ≈ 150 people per km².</a:t>
+            </a:r>
+            <a:endParaRPr lang="en-US" sz="4000" dirty="0"/>
+          </a:p>
+          <a:p>
+            <a:pPr algn="l" indent="0" marL="0">
+              <a:spcAft>
+                <a:spcPts val="800"/>
+              </a:spcAft>
+              <a:buNone/>
+            </a:pPr>
+            <a:r>
+              <a:rPr lang="en-US" sz="4000" b="1" dirty="0">
+                <a:solidFill>
+                  <a:srgbClr val="111111"/>
+                </a:solidFill>
+                <a:latin typeface="Times New Roman" pitchFamily="34" charset="0"/>
+                <a:ea typeface="Times New Roman" pitchFamily="34" charset="-122"/>
+                <a:cs typeface="Times New Roman" pitchFamily="34" charset="-120"/>
+              </a:rPr>
+              <a:t>North: </a:t>
+            </a:r>
+            <a:pPr algn="l" indent="0" marL="0">
+              <a:spcAft>
+                <a:spcPts val="800"/>
+              </a:spcAft>
+              <a:buNone/>
+            </a:pPr>
+            <a:r>
+              <a:rPr lang="en-US" sz="4000" dirty="0">
+                <a:solidFill>
+                  <a:srgbClr val="111111"/>
+                </a:solidFill>
+                <a:latin typeface="Times New Roman" pitchFamily="34" charset="0"/>
+                <a:ea typeface="Times New Roman" pitchFamily="34" charset="-122"/>
+                <a:cs typeface="Times New Roman" pitchFamily="34" charset="-120"/>
+              </a:rPr>
+              <a:t>2,780,000 ÷ 66,090 km² ≈ 42 people per km².</a:t>
+            </a:r>
+            <a:endParaRPr lang="en-US" sz="4000" dirty="0"/>
+          </a:p>
+          <a:p>
+            <a:pPr algn="l" indent="0" marL="0">
+              <a:spcAft>
+                <a:spcPts val="800"/>
+              </a:spcAft>
+              <a:buNone/>
+            </a:pPr>
+            <a:r>
+              <a:rPr lang="en-US" sz="4000" b="1" dirty="0">
+                <a:solidFill>
+                  <a:srgbClr val="111111"/>
+                </a:solidFill>
+                <a:latin typeface="Times New Roman" pitchFamily="34" charset="0"/>
+                <a:ea typeface="Times New Roman" pitchFamily="34" charset="-122"/>
+                <a:cs typeface="Times New Roman" pitchFamily="34" charset="-120"/>
+              </a:rPr>
+              <a:t>East: </a:t>
+            </a:r>
+            <a:pPr algn="l" indent="0" marL="0">
+              <a:spcAft>
+                <a:spcPts val="800"/>
+              </a:spcAft>
+              <a:buNone/>
+            </a:pPr>
+            <a:r>
+              <a:rPr lang="en-US" sz="4000" dirty="0">
+                <a:solidFill>
+                  <a:srgbClr val="111111"/>
+                </a:solidFill>
+                <a:latin typeface="Times New Roman" pitchFamily="34" charset="0"/>
+                <a:ea typeface="Times New Roman" pitchFamily="34" charset="-122"/>
+                <a:cs typeface="Times New Roman" pitchFamily="34" charset="-120"/>
+              </a:rPr>
+              <a:t>1,200,000 ÷ 109,002 km² ≈ 11 people per km².</a:t>
             </a:r>
             <a:endParaRPr lang="en-US" sz="4000" dirty="0"/>
           </a:p>
@@ -14283,9 +14270,129 @@
           </a:p>
         </p:txBody>
       </p:sp>
+      <p:sp>
+        <p:nvSpPr>
+          <p:cNvPr id="3" name="Text 1"/>
+          <p:cNvSpPr/>
+          <p:nvPr/>
+        </p:nvSpPr>
+        <p:spPr>
+          <a:xfrm>
+            <a:off x="365760" y="1005840"/>
+            <a:ext cx="11460175" cy="731520"/>
+          </a:xfrm>
+          <a:prstGeom prst="rect">
+            <a:avLst/>
+          </a:prstGeom>
+          <a:noFill/>
+          <a:ln/>
+        </p:spPr>
+        <p:txBody>
+          <a:bodyPr wrap="square" lIns="0" tIns="0" rIns="0" bIns="0" rtlCol="0" anchor="ctr">
+            <a:normAutofit/>
+          </a:bodyPr>
+          <a:lstStyle/>
+          <a:p>
+            <a:pPr algn="ctr" indent="0" marL="0">
+              <a:buNone/>
+            </a:pPr>
+            <a:r>
+              <a:rPr lang="en-US" sz="3600" b="1" dirty="0">
+                <a:solidFill>
+                  <a:srgbClr val="990011"/>
+                </a:solidFill>
+                <a:latin typeface="Times New Roman" pitchFamily="34" charset="0"/>
+                <a:ea typeface="Times New Roman" pitchFamily="34" charset="-122"/>
+                <a:cs typeface="Times New Roman" pitchFamily="34" charset="-120"/>
+              </a:rPr>
+              <a:t>2. Areas of Dense, Moderate and Low Density</a:t>
+            </a:r>
+            <a:endParaRPr lang="en-US" sz="3600" dirty="0"/>
+          </a:p>
+        </p:txBody>
+      </p:sp>
+      <p:sp>
+        <p:nvSpPr>
+          <p:cNvPr id="4" name="Text 2"/>
+          <p:cNvSpPr/>
+          <p:nvPr/>
+        </p:nvSpPr>
+        <p:spPr>
+          <a:xfrm>
+            <a:off x="365760" y="1783080"/>
+            <a:ext cx="4846320" cy="4617720"/>
+          </a:xfrm>
+          <a:prstGeom prst="rect">
+            <a:avLst/>
+          </a:prstGeom>
+          <a:noFill/>
+          <a:ln/>
+        </p:spPr>
+        <p:txBody>
+          <a:bodyPr wrap="square" lIns="0" tIns="0" rIns="0" bIns="0" rtlCol="0" anchor="t"/>
+          <a:lstStyle/>
+          <a:p>
+            <a:pPr algn="l" indent="0" marL="0">
+              <a:spcAft>
+                <a:spcPts val="800"/>
+              </a:spcAft>
+              <a:buNone/>
+            </a:pPr>
+            <a:r>
+              <a:rPr lang="en-US" sz="3600" i="1" dirty="0">
+                <a:solidFill>
+                  <a:srgbClr val="111111"/>
+                </a:solidFill>
+                <a:latin typeface="Times New Roman" pitchFamily="34" charset="0"/>
+                <a:ea typeface="Times New Roman" pitchFamily="34" charset="-122"/>
+                <a:cs typeface="Times New Roman" pitchFamily="34" charset="-120"/>
+              </a:rPr>
+              <a:t>The map of Cameroon shows the following areas:</a:t>
+            </a:r>
+            <a:endParaRPr lang="en-US" sz="3600" dirty="0"/>
+          </a:p>
+          <a:p>
+            <a:pPr algn="l" indent="0" marL="0">
+              <a:spcAft>
+                <a:spcPts val="800"/>
+              </a:spcAft>
+              <a:buNone/>
+            </a:pPr>
+            <a:r>
+              <a:rPr lang="en-US" sz="3600" b="1" dirty="0">
+                <a:solidFill>
+                  <a:srgbClr val="111111"/>
+                </a:solidFill>
+                <a:latin typeface="Times New Roman" pitchFamily="34" charset="0"/>
+                <a:ea typeface="Times New Roman" pitchFamily="34" charset="-122"/>
+                <a:cs typeface="Times New Roman" pitchFamily="34" charset="-120"/>
+              </a:rPr>
+              <a:t>High density (over 100 per km²): </a:t>
+            </a:r>
+            <a:pPr algn="l" indent="0" marL="0">
+              <a:spcAft>
+                <a:spcPts val="800"/>
+              </a:spcAft>
+              <a:buNone/>
+            </a:pPr>
+            <a:r>
+              <a:rPr lang="en-US" sz="3600" dirty="0">
+                <a:solidFill>
+                  <a:srgbClr val="111111"/>
+                </a:solidFill>
+                <a:latin typeface="Times New Roman" pitchFamily="34" charset="0"/>
+                <a:ea typeface="Times New Roman" pitchFamily="34" charset="-122"/>
+                <a:cs typeface="Times New Roman" pitchFamily="34" charset="-120"/>
+              </a:rPr>
+              <a:t>The Littoral, the West, the North-West and the Far North.</a:t>
+            </a:r>
+            <a:endParaRPr lang="en-US" sz="3600" dirty="0"/>
+          </a:p>
+        </p:txBody>
+      </p:sp>
       <p:pic>
         <p:nvPicPr>
-          <p:cNvPr id="3" name="Image 0" descr="/home/claude/f4/img/minesec_sheet.png">    </p:cNvPr>
+          <p:cNvPr id="5" name="Image 0" descr="/home/claude/f4/img/v2/choropleth_big.png">    </p:cNvPr>
           <p:cNvPicPr>
             <a:picLocks noChangeAspect="1"/>
           </p:cNvPicPr>
@@ -14299,8 +14406,8 @@
         </p:blipFill>
         <p:spPr>
           <a:xfrm>
-            <a:off x="0" y="658368"/>
-            <a:ext cx="2468880" cy="5833872"/>
+            <a:off x="5349240" y="2253310"/>
+            <a:ext cx="6659575" cy="3329788"/>
           </a:xfrm>
           <a:prstGeom prst="rect">
             <a:avLst/>
@@ -14309,14 +14416,14 @@
       </p:pic>
       <p:sp>
         <p:nvSpPr>
-          <p:cNvPr id="4" name="Text 1"/>
+          <p:cNvPr id="6" name="Text 3"/>
           <p:cNvSpPr/>
           <p:nvPr/>
         </p:nvSpPr>
         <p:spPr>
           <a:xfrm>
-            <a:off x="2697480" y="1005840"/>
-            <a:ext cx="9174175" cy="731520"/>
+            <a:off x="5349240" y="6089904"/>
+            <a:ext cx="6659575" cy="347472"/>
           </a:xfrm>
           <a:prstGeom prst="rect">
             <a:avLst/>
@@ -14325,142 +14432,24 @@
           <a:ln/>
         </p:spPr>
         <p:txBody>
-          <a:bodyPr wrap="square" lIns="0" tIns="0" rIns="0" bIns="0" rtlCol="0" anchor="ctr">
-            <a:normAutofit/>
-          </a:bodyPr>
+          <a:bodyPr wrap="square" lIns="0" tIns="0" rIns="0" bIns="0" rtlCol="0" anchor="ctr"/>
           <a:lstStyle/>
           <a:p>
             <a:pPr algn="ctr" indent="0" marL="0">
               <a:buNone/>
             </a:pPr>
             <a:r>
-              <a:rPr lang="en-US" sz="3600" b="1" dirty="0">
-                <a:solidFill>
-                  <a:srgbClr val="990011"/>
+              <a:rPr lang="en-US" sz="1600" i="1" dirty="0">
+                <a:solidFill>
+                  <a:srgbClr val="555555"/>
                 </a:solidFill>
                 <a:latin typeface="Times New Roman" pitchFamily="34" charset="0"/>
                 <a:ea typeface="Times New Roman" pitchFamily="34" charset="-122"/>
                 <a:cs typeface="Times New Roman" pitchFamily="34" charset="-120"/>
               </a:rPr>
-              <a:t>2. Areas of Density in Cameroon</a:t>
-            </a:r>
-            <a:endParaRPr lang="en-US" sz="3600" dirty="0"/>
-          </a:p>
-        </p:txBody>
-      </p:sp>
-      <p:sp>
-        <p:nvSpPr>
-          <p:cNvPr id="5" name="Text 2"/>
-          <p:cNvSpPr/>
-          <p:nvPr/>
-        </p:nvSpPr>
-        <p:spPr>
-          <a:xfrm>
-            <a:off x="2697480" y="1783080"/>
-            <a:ext cx="9174175" cy="4663440"/>
-          </a:xfrm>
-          <a:prstGeom prst="rect">
-            <a:avLst/>
-          </a:prstGeom>
-          <a:noFill/>
-          <a:ln/>
-        </p:spPr>
-        <p:txBody>
-          <a:bodyPr wrap="square" lIns="0" tIns="0" rIns="0" bIns="0" rtlCol="0" anchor="t"/>
-          <a:lstStyle/>
-          <a:p>
-            <a:pPr algn="l" indent="0" marL="0">
-              <a:spcAft>
-                <a:spcPts val="800"/>
-              </a:spcAft>
-              <a:buNone/>
-            </a:pPr>
-            <a:r>
-              <a:rPr lang="en-US" sz="4000" i="1" dirty="0">
-                <a:solidFill>
-                  <a:srgbClr val="111111"/>
-                </a:solidFill>
-                <a:latin typeface="Times New Roman" pitchFamily="34" charset="0"/>
-                <a:ea typeface="Times New Roman" pitchFamily="34" charset="-122"/>
-                <a:cs typeface="Times New Roman" pitchFamily="34" charset="-120"/>
-              </a:rPr>
-              <a:t>Cameroon has the following areas of density:</a:t>
-            </a:r>
-            <a:endParaRPr lang="en-US" sz="4000" dirty="0"/>
-          </a:p>
-          <a:p>
-            <a:pPr algn="l" indent="0" marL="0">
-              <a:spcAft>
-                <a:spcPts val="800"/>
-              </a:spcAft>
-              <a:buNone/>
-            </a:pPr>
-            <a:r>
-              <a:rPr lang="en-US" sz="4000" b="1" dirty="0">
-                <a:solidFill>
-                  <a:srgbClr val="111111"/>
-                </a:solidFill>
-                <a:latin typeface="Times New Roman" pitchFamily="34" charset="0"/>
-                <a:ea typeface="Times New Roman" pitchFamily="34" charset="-122"/>
-                <a:cs typeface="Times New Roman" pitchFamily="34" charset="-120"/>
-              </a:rPr>
-              <a:t>High density: </a:t>
-            </a:r>
-            <a:pPr algn="l" indent="0" marL="0">
-              <a:spcAft>
-                <a:spcPts val="800"/>
-              </a:spcAft>
-              <a:buNone/>
-            </a:pPr>
-            <a:r>
-              <a:rPr lang="en-US" sz="4000" dirty="0">
-                <a:solidFill>
-                  <a:srgbClr val="111111"/>
-                </a:solidFill>
-                <a:latin typeface="Times New Roman" pitchFamily="34" charset="0"/>
-                <a:ea typeface="Times New Roman" pitchFamily="34" charset="-122"/>
-                <a:cs typeface="Times New Roman" pitchFamily="34" charset="-120"/>
-              </a:rPr>
-              <a:t>The West, North-West, Littoral and the Mandara area of the Far North are crowded.</a:t>
-            </a:r>
-            <a:endParaRPr lang="en-US" sz="4000" dirty="0"/>
-          </a:p>
-          <a:p>
-            <a:pPr algn="l" indent="0" marL="0">
-              <a:spcAft>
-                <a:spcPts val="800"/>
-              </a:spcAft>
-              <a:buNone/>
-            </a:pPr>
-            <a:r>
-              <a:rPr lang="en-US" sz="4000" b="1" dirty="0">
-                <a:solidFill>
-                  <a:srgbClr val="111111"/>
-                </a:solidFill>
-                <a:latin typeface="Times New Roman" pitchFamily="34" charset="0"/>
-                <a:ea typeface="Times New Roman" pitchFamily="34" charset="-122"/>
-                <a:cs typeface="Times New Roman" pitchFamily="34" charset="-120"/>
-              </a:rPr>
-              <a:t>Moderate density: </a:t>
-            </a:r>
-            <a:pPr algn="l" indent="0" marL="0">
-              <a:spcAft>
-                <a:spcPts val="800"/>
-              </a:spcAft>
-              <a:buNone/>
-            </a:pPr>
-            <a:r>
-              <a:rPr lang="en-US" sz="4000" dirty="0">
-                <a:solidFill>
-                  <a:srgbClr val="111111"/>
-                </a:solidFill>
-                <a:latin typeface="Times New Roman" pitchFamily="34" charset="0"/>
-                <a:ea typeface="Times New Roman" pitchFamily="34" charset="-122"/>
-                <a:cs typeface="Times New Roman" pitchFamily="34" charset="-120"/>
-              </a:rPr>
-              <a:t>The Centre, South-West and North have a moderate density.</a:t>
-            </a:r>
-            <a:endParaRPr lang="en-US" sz="4000" dirty="0"/>
+              <a:t>Illustration: density of the regions of Cameroon</a:t>
+            </a:r>
+            <a:endParaRPr lang="en-US" sz="1600" dirty="0"/>
           </a:p>
         </p:txBody>
       </p:sp>
@@ -14635,7 +14624,7 @@
                 <a:ea typeface="Times New Roman" pitchFamily="34" charset="-122"/>
                 <a:cs typeface="Times New Roman" pitchFamily="34" charset="-120"/>
               </a:rPr>
-              <a:t>2. Areas of Density in Cameroon (continued)</a:t>
+              <a:t>2. Areas of Dense, Moderate and Low Density</a:t>
             </a:r>
             <a:endParaRPr lang="en-US" sz="3600" dirty="0"/>
           </a:p>
@@ -14677,7 +14666,7 @@
                 <a:ea typeface="Times New Roman" pitchFamily="34" charset="-122"/>
                 <a:cs typeface="Times New Roman" pitchFamily="34" charset="-120"/>
               </a:rPr>
-              <a:t>Low density: </a:t>
+              <a:t>Moderate density (20 to 100 per km²): </a:t>
             </a:r>
             <a:pPr algn="l" indent="0" marL="0">
               <a:spcAft>
@@ -14694,7 +14683,44 @@
                 <a:ea typeface="Times New Roman" pitchFamily="34" charset="-122"/>
                 <a:cs typeface="Times New Roman" pitchFamily="34" charset="-120"/>
               </a:rPr>
-              <a:t>The East, South and Adamawa have few people per km².</a:t>
+              <a:t>The Centre, the South-West and the North.</a:t>
+            </a:r>
+            <a:endParaRPr lang="en-US" sz="4000" dirty="0"/>
+          </a:p>
+          <a:p>
+            <a:pPr algn="l" indent="0" marL="0">
+              <a:spcAft>
+                <a:spcPts val="800"/>
+              </a:spcAft>
+              <a:buNone/>
+            </a:pPr>
+            <a:r>
+              <a:rPr lang="en-US" sz="4000" b="1" dirty="0">
+                <a:solidFill>
+                  <a:srgbClr val="111111"/>
+                </a:solidFill>
+                <a:latin typeface="Times New Roman" pitchFamily="34" charset="0"/>
+                <a:ea typeface="Times New Roman" pitchFamily="34" charset="-122"/>
+                <a:cs typeface="Times New Roman" pitchFamily="34" charset="-120"/>
+              </a:rPr>
+              <a:t>Low density (under 20 per km²): </a:t>
+            </a:r>
+            <a:pPr algn="l" indent="0" marL="0">
+              <a:spcAft>
+                <a:spcPts val="800"/>
+              </a:spcAft>
+              <a:buNone/>
+            </a:pPr>
+            <a:r>
+              <a:rPr lang="en-US" sz="4000" dirty="0">
+                <a:solidFill>
+                  <a:srgbClr val="111111"/>
+                </a:solidFill>
+                <a:latin typeface="Times New Roman" pitchFamily="34" charset="0"/>
+                <a:ea typeface="Times New Roman" pitchFamily="34" charset="-122"/>
+                <a:cs typeface="Times New Roman" pitchFamily="34" charset="-120"/>
+              </a:rPr>
+              <a:t>The East, the South and the Adamawa.</a:t>
             </a:r>
             <a:endParaRPr lang="en-US" sz="4000" dirty="0"/>
           </a:p>
@@ -15045,54 +15071,15 @@
                 <a:ea typeface="Calibri" pitchFamily="34" charset="-122"/>
                 <a:cs typeface="Calibri" pitchFamily="34" charset="-120"/>
               </a:rPr>
-              <a:t>BOARD SUMMARY</a:t>
+              <a:t>FORMATIVE EVALUATION</a:t>
             </a:r>
             <a:endParaRPr lang="en-US" sz="1400" dirty="0"/>
-          </a:p>
-        </p:txBody>
-      </p:sp>
-      <p:sp>
-        <p:nvSpPr>
-          <p:cNvPr id="3" name="Text 1"/>
-          <p:cNvSpPr/>
-          <p:nvPr/>
-        </p:nvSpPr>
-        <p:spPr>
-          <a:xfrm>
-            <a:off x="457200" y="1005840"/>
-            <a:ext cx="11277295" cy="731520"/>
-          </a:xfrm>
-          <a:prstGeom prst="rect">
-            <a:avLst/>
-          </a:prstGeom>
-          <a:noFill/>
-          <a:ln/>
-        </p:spPr>
-        <p:txBody>
-          <a:bodyPr wrap="square" lIns="0" tIns="0" rIns="0" bIns="0" rtlCol="0" anchor="ctr"/>
-          <a:lstStyle/>
-          <a:p>
-            <a:pPr algn="ctr" indent="0" marL="0">
-              <a:buNone/>
-            </a:pPr>
-            <a:r>
-              <a:rPr lang="en-US" sz="3600" b="1" dirty="0">
-                <a:solidFill>
-                  <a:srgbClr val="990011"/>
-                </a:solidFill>
-                <a:latin typeface="Times New Roman" pitchFamily="34" charset="0"/>
-                <a:ea typeface="Times New Roman" pitchFamily="34" charset="-122"/>
-                <a:cs typeface="Times New Roman" pitchFamily="34" charset="-120"/>
-              </a:rPr>
-              <a:t>2. Areas of Density in Cameroon</a:t>
-            </a:r>
-            <a:endParaRPr lang="en-US" sz="3600" dirty="0"/>
           </a:p>
         </p:txBody>
       </p:sp>
       <p:pic>
         <p:nvPicPr>
-          <p:cNvPr id="4" name="Image 0" descr="/home/claude/f4/img/v2/cmr_regions_big.png">    </p:cNvPr>
+          <p:cNvPr id="3" name="Image 0" descr="/home/claude/f4/img/minesec_sheet.png">    </p:cNvPr>
           <p:cNvPicPr>
             <a:picLocks noChangeAspect="1"/>
           </p:cNvPicPr>
@@ -15106,8 +15093,8 @@
         </p:blipFill>
         <p:spPr>
           <a:xfrm>
-            <a:off x="2191621" y="1783080"/>
-            <a:ext cx="7808453" cy="4270248"/>
+            <a:off x="0" y="658368"/>
+            <a:ext cx="5120640" cy="5833872"/>
           </a:xfrm>
           <a:prstGeom prst="rect">
             <a:avLst/>
@@ -15116,14 +15103,14 @@
       </p:pic>
       <p:sp>
         <p:nvSpPr>
-          <p:cNvPr id="5" name="Text 2"/>
+          <p:cNvPr id="4" name="Text 1"/>
           <p:cNvSpPr/>
           <p:nvPr/>
         </p:nvSpPr>
         <p:spPr>
           <a:xfrm>
-            <a:off x="457200" y="6089904"/>
-            <a:ext cx="11277295" cy="347472"/>
+            <a:off x="5349240" y="1005840"/>
+            <a:ext cx="6522415" cy="731520"/>
           </a:xfrm>
           <a:prstGeom prst="rect">
             <a:avLst/>
@@ -15132,24 +15119,68 @@
           <a:ln/>
         </p:spPr>
         <p:txBody>
-          <a:bodyPr wrap="square" lIns="0" tIns="0" rIns="0" bIns="0" rtlCol="0" anchor="ctr"/>
+          <a:bodyPr wrap="square" lIns="0" tIns="0" rIns="0" bIns="0" rtlCol="0" anchor="ctr">
+            <a:normAutofit/>
+          </a:bodyPr>
           <a:lstStyle/>
           <a:p>
             <a:pPr algn="ctr" indent="0" marL="0">
               <a:buNone/>
             </a:pPr>
             <a:r>
-              <a:rPr lang="en-US" sz="1800" i="1" dirty="0">
-                <a:solidFill>
-                  <a:srgbClr val="555555"/>
+              <a:rPr lang="en-US" sz="3600" b="1" dirty="0">
+                <a:solidFill>
+                  <a:srgbClr val="990011"/>
                 </a:solidFill>
                 <a:latin typeface="Times New Roman" pitchFamily="34" charset="0"/>
                 <a:ea typeface="Times New Roman" pitchFamily="34" charset="-122"/>
                 <a:cs typeface="Times New Roman" pitchFamily="34" charset="-120"/>
               </a:rPr>
-              <a:t>Illustration: the regions of Cameroon</a:t>
-            </a:r>
-            <a:endParaRPr lang="en-US" sz="1800" dirty="0"/>
+              <a:t>Evaluation 1</a:t>
+            </a:r>
+            <a:endParaRPr lang="en-US" sz="3600" dirty="0"/>
+          </a:p>
+        </p:txBody>
+      </p:sp>
+      <p:sp>
+        <p:nvSpPr>
+          <p:cNvPr id="5" name="Text 2"/>
+          <p:cNvSpPr/>
+          <p:nvPr/>
+        </p:nvSpPr>
+        <p:spPr>
+          <a:xfrm>
+            <a:off x="5349240" y="1783080"/>
+            <a:ext cx="6522415" cy="4663440"/>
+          </a:xfrm>
+          <a:prstGeom prst="rect">
+            <a:avLst/>
+          </a:prstGeom>
+          <a:noFill/>
+          <a:ln/>
+        </p:spPr>
+        <p:txBody>
+          <a:bodyPr wrap="square" lIns="0" tIns="0" rIns="0" bIns="0" rtlCol="0" anchor="t"/>
+          <a:lstStyle/>
+          <a:p>
+            <a:pPr algn="l" indent="0" marL="0">
+              <a:spcAft>
+                <a:spcPts val="800"/>
+              </a:spcAft>
+              <a:buNone/>
+            </a:pPr>
+            <a:r>
+              <a:rPr lang="en-US" sz="4000" dirty="0">
+                <a:solidFill>
+                  <a:srgbClr val="111111"/>
+                </a:solidFill>
+                <a:latin typeface="Times New Roman" pitchFamily="34" charset="0"/>
+                <a:ea typeface="Times New Roman" pitchFamily="34" charset="-122"/>
+                <a:cs typeface="Times New Roman" pitchFamily="34" charset="-120"/>
+              </a:rPr>
+              <a:t>A region has 900,000 people on 30,000 km². Find its density.</a:t>
+            </a:r>
+            <a:endParaRPr lang="en-US" sz="4000" dirty="0"/>
           </a:p>
         </p:txBody>
       </p:sp>
@@ -15324,7 +15355,7 @@
                 <a:ea typeface="Times New Roman" pitchFamily="34" charset="-122"/>
                 <a:cs typeface="Times New Roman" pitchFamily="34" charset="-120"/>
               </a:rPr>
-              <a:t>Evaluation 1</a:t>
+              <a:t>Expected Answer</a:t>
             </a:r>
             <a:endParaRPr lang="en-US" sz="3600" dirty="0"/>
           </a:p>
@@ -15366,7 +15397,7 @@
                 <a:ea typeface="Times New Roman" pitchFamily="34" charset="-122"/>
                 <a:cs typeface="Times New Roman" pitchFamily="34" charset="-120"/>
               </a:rPr>
-              <a:t>A region has 900,000 people on 30,000 km². Find its density.</a:t>
+              <a:t>900,000 ÷ 30,000 = 30 people per km².</a:t>
             </a:r>
             <a:endParaRPr lang="en-US" sz="4000" dirty="0"/>
           </a:p>
@@ -15543,7 +15574,7 @@
                 <a:ea typeface="Times New Roman" pitchFamily="34" charset="-122"/>
                 <a:cs typeface="Times New Roman" pitchFamily="34" charset="-120"/>
               </a:rPr>
-              <a:t>Expected Answer</a:t>
+              <a:t>Evaluation 2</a:t>
             </a:r>
             <a:endParaRPr lang="en-US" sz="3600" dirty="0"/>
           </a:p>
@@ -15585,7 +15616,7 @@
                 <a:ea typeface="Times New Roman" pitchFamily="34" charset="-122"/>
                 <a:cs typeface="Times New Roman" pitchFamily="34" charset="-120"/>
               </a:rPr>
-              <a:t>900,000 ÷ 30,000 = 30 people per km².</a:t>
+              <a:t>Name the region with the lowest density.</a:t>
             </a:r>
             <a:endParaRPr lang="en-US" sz="4000" dirty="0"/>
           </a:p>
@@ -15762,7 +15793,7 @@
                 <a:ea typeface="Times New Roman" pitchFamily="34" charset="-122"/>
                 <a:cs typeface="Times New Roman" pitchFamily="34" charset="-120"/>
               </a:rPr>
-              <a:t>Evaluation 2</a:t>
+              <a:t>Expected Answer</a:t>
             </a:r>
             <a:endParaRPr lang="en-US" sz="3600" dirty="0"/>
           </a:p>
@@ -15804,7 +15835,7 @@
                 <a:ea typeface="Times New Roman" pitchFamily="34" charset="-122"/>
                 <a:cs typeface="Times New Roman" pitchFamily="34" charset="-120"/>
               </a:rPr>
-              <a:t>Name the region with the lowest density.</a:t>
+              <a:t>The East.</a:t>
             </a:r>
             <a:endParaRPr lang="en-US" sz="4000" dirty="0"/>
           </a:p>
@@ -15916,7 +15947,7 @@
                 <a:ea typeface="Calibri" pitchFamily="34" charset="-122"/>
                 <a:cs typeface="Calibri" pitchFamily="34" charset="-120"/>
               </a:rPr>
-              <a:t>FORMATIVE EVALUATION</a:t>
+              <a:t>REMEDIATION</a:t>
             </a:r>
             <a:endParaRPr lang="en-US" sz="1400" dirty="0"/>
           </a:p>
@@ -15939,7 +15970,7 @@
         <p:spPr>
           <a:xfrm>
             <a:off x="0" y="658368"/>
-            <a:ext cx="5120640" cy="5833872"/>
+            <a:ext cx="3840480" cy="5833872"/>
           </a:xfrm>
           <a:prstGeom prst="rect">
             <a:avLst/>
@@ -15954,8 +15985,8 @@
         </p:nvSpPr>
         <p:spPr>
           <a:xfrm>
-            <a:off x="5349240" y="1005840"/>
-            <a:ext cx="6522415" cy="731520"/>
+            <a:off x="4069080" y="1005840"/>
+            <a:ext cx="7802575" cy="731520"/>
           </a:xfrm>
           <a:prstGeom prst="rect">
             <a:avLst/>
@@ -15981,7 +16012,7 @@
                 <a:ea typeface="Times New Roman" pitchFamily="34" charset="-122"/>
                 <a:cs typeface="Times New Roman" pitchFamily="34" charset="-120"/>
               </a:rPr>
-              <a:t>Expected Answer</a:t>
+              <a:t>Remediation</a:t>
             </a:r>
             <a:endParaRPr lang="en-US" sz="3600" dirty="0"/>
           </a:p>
@@ -15995,8 +16026,8 @@
         </p:nvSpPr>
         <p:spPr>
           <a:xfrm>
-            <a:off x="5349240" y="1783080"/>
-            <a:ext cx="6522415" cy="4663440"/>
+            <a:off x="4069080" y="1783080"/>
+            <a:ext cx="7802575" cy="4663440"/>
           </a:xfrm>
           <a:prstGeom prst="rect">
             <a:avLst/>
@@ -16015,7 +16046,7 @@
               <a:buNone/>
             </a:pPr>
             <a:r>
-              <a:rPr lang="en-US" sz="4000" dirty="0">
+              <a:rPr lang="en-US" sz="4000" b="1" dirty="0">
                 <a:solidFill>
                   <a:srgbClr val="111111"/>
                 </a:solidFill>
@@ -16023,7 +16054,73 @@
                 <a:ea typeface="Times New Roman" pitchFamily="34" charset="-122"/>
                 <a:cs typeface="Times New Roman" pitchFamily="34" charset="-120"/>
               </a:rPr>
-              <a:t>The East.</a:t>
+              <a:t>Fill in the blanks:</a:t>
+            </a:r>
+            <a:endParaRPr lang="en-US" sz="4000" dirty="0"/>
+          </a:p>
+          <a:p>
+            <a:pPr algn="l" marL="342900" indent="-342900">
+              <a:spcAft>
+                <a:spcPts val="800"/>
+              </a:spcAft>
+              <a:buSzPct val="100000"/>
+              <a:buFont typeface="+mj-lt"/>
+              <a:buAutoNum type="arabicPeriod" startAt="1"/>
+            </a:pPr>
+            <a:r>
+              <a:rPr lang="en-US" sz="4000" dirty="0">
+                <a:solidFill>
+                  <a:srgbClr val="111111"/>
+                </a:solidFill>
+                <a:latin typeface="Times New Roman" pitchFamily="34" charset="0"/>
+                <a:ea typeface="Times New Roman" pitchFamily="34" charset="-122"/>
+                <a:cs typeface="Times New Roman" pitchFamily="34" charset="-120"/>
+              </a:rPr>
+              <a:t>A crowded region has a ______ density.</a:t>
+            </a:r>
+            <a:endParaRPr lang="en-US" sz="4000" dirty="0"/>
+          </a:p>
+          <a:p>
+            <a:pPr algn="l" marL="342900" indent="-342900">
+              <a:spcAft>
+                <a:spcPts val="800"/>
+              </a:spcAft>
+              <a:buSzPct val="100000"/>
+              <a:buFont typeface="+mj-lt"/>
+              <a:buAutoNum type="arabicPeriod" startAt="1"/>
+            </a:pPr>
+            <a:r>
+              <a:rPr lang="en-US" sz="4000" dirty="0">
+                <a:solidFill>
+                  <a:srgbClr val="111111"/>
+                </a:solidFill>
+                <a:latin typeface="Times New Roman" pitchFamily="34" charset="0"/>
+                <a:ea typeface="Times New Roman" pitchFamily="34" charset="-122"/>
+                <a:cs typeface="Times New Roman" pitchFamily="34" charset="-120"/>
+              </a:rPr>
+              <a:t>The East has a ______ density.</a:t>
+            </a:r>
+            <a:endParaRPr lang="en-US" sz="4000" dirty="0"/>
+          </a:p>
+          <a:p>
+            <a:pPr algn="l" marL="342900" indent="-342900">
+              <a:spcAft>
+                <a:spcPts val="800"/>
+              </a:spcAft>
+              <a:buSzPct val="100000"/>
+              <a:buFont typeface="+mj-lt"/>
+              <a:buAutoNum type="arabicPeriod" startAt="1"/>
+            </a:pPr>
+            <a:r>
+              <a:rPr lang="en-US" sz="4000" dirty="0">
+                <a:solidFill>
+                  <a:srgbClr val="111111"/>
+                </a:solidFill>
+                <a:latin typeface="Times New Roman" pitchFamily="34" charset="0"/>
+                <a:ea typeface="Times New Roman" pitchFamily="34" charset="-122"/>
+                <a:cs typeface="Times New Roman" pitchFamily="34" charset="-120"/>
+              </a:rPr>
+              <a:t>Density is given in people per ______.</a:t>
             </a:r>
             <a:endParaRPr lang="en-US" sz="4000" dirty="0"/>
           </a:p>
@@ -16135,7 +16232,7 @@
                 <a:ea typeface="Calibri" pitchFamily="34" charset="-122"/>
                 <a:cs typeface="Calibri" pitchFamily="34" charset="-120"/>
               </a:rPr>
-              <a:t>REMEDIATION</a:t>
+              <a:t>HOMEWORK</a:t>
             </a:r>
             <a:endParaRPr lang="en-US" sz="1400" dirty="0"/>
           </a:p>
@@ -16158,7 +16255,7 @@
         <p:spPr>
           <a:xfrm>
             <a:off x="0" y="658368"/>
-            <a:ext cx="3840480" cy="5833872"/>
+            <a:ext cx="5120640" cy="5833872"/>
           </a:xfrm>
           <a:prstGeom prst="rect">
             <a:avLst/>
@@ -16173,8 +16270,8 @@
         </p:nvSpPr>
         <p:spPr>
           <a:xfrm>
-            <a:off x="4069080" y="1005840"/>
-            <a:ext cx="7802575" cy="731520"/>
+            <a:off x="5349240" y="1005840"/>
+            <a:ext cx="6522415" cy="731520"/>
           </a:xfrm>
           <a:prstGeom prst="rect">
             <a:avLst/>
@@ -16200,7 +16297,7 @@
                 <a:ea typeface="Times New Roman" pitchFamily="34" charset="-122"/>
                 <a:cs typeface="Times New Roman" pitchFamily="34" charset="-120"/>
               </a:rPr>
-              <a:t>Remediation</a:t>
+              <a:t>Homework</a:t>
             </a:r>
             <a:endParaRPr lang="en-US" sz="3600" dirty="0"/>
           </a:p>
@@ -16214,8 +16311,8 @@
         </p:nvSpPr>
         <p:spPr>
           <a:xfrm>
-            <a:off x="4069080" y="1783080"/>
-            <a:ext cx="7802575" cy="4663440"/>
+            <a:off x="5349240" y="1783080"/>
+            <a:ext cx="6522415" cy="4663440"/>
           </a:xfrm>
           <a:prstGeom prst="rect">
             <a:avLst/>
@@ -16234,7 +16331,7 @@
               <a:buNone/>
             </a:pPr>
             <a:r>
-              <a:rPr lang="en-US" sz="4000" b="1" dirty="0">
+              <a:rPr lang="en-US" sz="4000" dirty="0">
                 <a:solidFill>
                   <a:srgbClr val="111111"/>
                 </a:solidFill>
@@ -16242,73 +16339,7 @@
                 <a:ea typeface="Times New Roman" pitchFamily="34" charset="-122"/>
                 <a:cs typeface="Times New Roman" pitchFamily="34" charset="-120"/>
               </a:rPr>
-              <a:t>Fill in the blanks:</a:t>
-            </a:r>
-            <a:endParaRPr lang="en-US" sz="4000" dirty="0"/>
-          </a:p>
-          <a:p>
-            <a:pPr algn="l" marL="342900" indent="-342900">
-              <a:spcAft>
-                <a:spcPts val="800"/>
-              </a:spcAft>
-              <a:buSzPct val="100000"/>
-              <a:buFont typeface="+mj-lt"/>
-              <a:buAutoNum type="arabicPeriod" startAt="1"/>
-            </a:pPr>
-            <a:r>
-              <a:rPr lang="en-US" sz="4000" dirty="0">
-                <a:solidFill>
-                  <a:srgbClr val="111111"/>
-                </a:solidFill>
-                <a:latin typeface="Times New Roman" pitchFamily="34" charset="0"/>
-                <a:ea typeface="Times New Roman" pitchFamily="34" charset="-122"/>
-                <a:cs typeface="Times New Roman" pitchFamily="34" charset="-120"/>
-              </a:rPr>
-              <a:t>A crowded region has a ______ density.</a:t>
-            </a:r>
-            <a:endParaRPr lang="en-US" sz="4000" dirty="0"/>
-          </a:p>
-          <a:p>
-            <a:pPr algn="l" marL="342900" indent="-342900">
-              <a:spcAft>
-                <a:spcPts val="800"/>
-              </a:spcAft>
-              <a:buSzPct val="100000"/>
-              <a:buFont typeface="+mj-lt"/>
-              <a:buAutoNum type="arabicPeriod" startAt="1"/>
-            </a:pPr>
-            <a:r>
-              <a:rPr lang="en-US" sz="4000" dirty="0">
-                <a:solidFill>
-                  <a:srgbClr val="111111"/>
-                </a:solidFill>
-                <a:latin typeface="Times New Roman" pitchFamily="34" charset="0"/>
-                <a:ea typeface="Times New Roman" pitchFamily="34" charset="-122"/>
-                <a:cs typeface="Times New Roman" pitchFamily="34" charset="-120"/>
-              </a:rPr>
-              <a:t>The East has a ______ density.</a:t>
-            </a:r>
-            <a:endParaRPr lang="en-US" sz="4000" dirty="0"/>
-          </a:p>
-          <a:p>
-            <a:pPr algn="l" marL="342900" indent="-342900">
-              <a:spcAft>
-                <a:spcPts val="800"/>
-              </a:spcAft>
-              <a:buSzPct val="100000"/>
-              <a:buFont typeface="+mj-lt"/>
-              <a:buAutoNum type="arabicPeriod" startAt="1"/>
-            </a:pPr>
-            <a:r>
-              <a:rPr lang="en-US" sz="4000" dirty="0">
-                <a:solidFill>
-                  <a:srgbClr val="111111"/>
-                </a:solidFill>
-                <a:latin typeface="Times New Roman" pitchFamily="34" charset="0"/>
-                <a:ea typeface="Times New Roman" pitchFamily="34" charset="-122"/>
-                <a:cs typeface="Times New Roman" pitchFamily="34" charset="-120"/>
-              </a:rPr>
-              <a:t>Density is given in people per ______.</a:t>
+              <a:t>Calculate the density of the Far North: about 4,450,000 people on 34,263 km².</a:t>
             </a:r>
             <a:endParaRPr lang="en-US" sz="4000" dirty="0"/>
           </a:p>
@@ -16420,7 +16451,7 @@
                 <a:ea typeface="Calibri" pitchFamily="34" charset="-122"/>
                 <a:cs typeface="Calibri" pitchFamily="34" charset="-120"/>
               </a:rPr>
-              <a:t>HOMEWORK</a:t>
+              <a:t>NEXT LESSON</a:t>
             </a:r>
             <a:endParaRPr lang="en-US" sz="1400" dirty="0"/>
           </a:p>
@@ -16485,7 +16516,7 @@
                 <a:ea typeface="Times New Roman" pitchFamily="34" charset="-122"/>
                 <a:cs typeface="Times New Roman" pitchFamily="34" charset="-120"/>
               </a:rPr>
-              <a:t>Homework</a:t>
+              <a:t>Next Lesson</a:t>
             </a:r>
             <a:endParaRPr lang="en-US" sz="3600" dirty="0"/>
           </a:p>
@@ -16509,17 +16540,17 @@
           <a:ln/>
         </p:spPr>
         <p:txBody>
-          <a:bodyPr wrap="square" lIns="0" tIns="0" rIns="0" bIns="0" rtlCol="0" anchor="t"/>
-          <a:lstStyle/>
-          <a:p>
-            <a:pPr algn="l" indent="0" marL="0">
+          <a:bodyPr wrap="square" lIns="0" tIns="0" rIns="0" bIns="0" rtlCol="0" anchor="ctr"/>
+          <a:lstStyle/>
+          <a:p>
+            <a:pPr algn="ctr" indent="0" marL="0">
               <a:spcAft>
                 <a:spcPts val="800"/>
               </a:spcAft>
               <a:buNone/>
             </a:pPr>
             <a:r>
-              <a:rPr lang="en-US" sz="4000" dirty="0">
+              <a:rPr lang="en-US" sz="4000" b="1" dirty="0">
                 <a:solidFill>
                   <a:srgbClr val="111111"/>
                 </a:solidFill>
@@ -16527,7 +16558,27 @@
                 <a:ea typeface="Times New Roman" pitchFamily="34" charset="-122"/>
                 <a:cs typeface="Times New Roman" pitchFamily="34" charset="-120"/>
               </a:rPr>
-              <a:t>Calculate the density of the North Region: about 3,000,000 people on 66,000 km².</a:t>
+              <a:t>Our next lesson will be on:</a:t>
+            </a:r>
+            <a:endParaRPr lang="en-US" sz="4000" dirty="0"/>
+          </a:p>
+          <a:p>
+            <a:pPr algn="ctr" indent="0" marL="0">
+              <a:spcAft>
+                <a:spcPts val="800"/>
+              </a:spcAft>
+              <a:buNone/>
+            </a:pPr>
+            <a:r>
+              <a:rPr lang="en-US" sz="4000" b="1" dirty="0">
+                <a:solidFill>
+                  <a:srgbClr val="990011"/>
+                </a:solidFill>
+                <a:latin typeface="Times New Roman" pitchFamily="34" charset="0"/>
+                <a:ea typeface="Times New Roman" pitchFamily="34" charset="-122"/>
+                <a:cs typeface="Times New Roman" pitchFamily="34" charset="-120"/>
+              </a:rPr>
+              <a:t>Lesson 3: Man in the Equatorial Zone</a:t>
             </a:r>
             <a:endParaRPr lang="en-US" sz="4000" dirty="0"/>
           </a:p>
@@ -16639,245 +16690,6 @@
                 <a:ea typeface="Calibri" pitchFamily="34" charset="-122"/>
                 <a:cs typeface="Calibri" pitchFamily="34" charset="-120"/>
               </a:rPr>
-              <a:t>NEXT LESSON</a:t>
-            </a:r>
-            <a:endParaRPr lang="en-US" sz="1400" dirty="0"/>
-          </a:p>
-        </p:txBody>
-      </p:sp>
-      <p:pic>
-        <p:nvPicPr>
-          <p:cNvPr id="3" name="Image 0" descr="/home/claude/f4/img/minesec_sheet.png">    </p:cNvPr>
-          <p:cNvPicPr>
-            <a:picLocks noChangeAspect="1"/>
-          </p:cNvPicPr>
-          <p:nvPr/>
-        </p:nvPicPr>
-        <p:blipFill>
-          <a:blip r:embed="rId1"/>
-          <a:stretch>
-            <a:fillRect/>
-          </a:stretch>
-        </p:blipFill>
-        <p:spPr>
-          <a:xfrm>
-            <a:off x="0" y="658368"/>
-            <a:ext cx="5120640" cy="5833872"/>
-          </a:xfrm>
-          <a:prstGeom prst="rect">
-            <a:avLst/>
-          </a:prstGeom>
-        </p:spPr>
-      </p:pic>
-      <p:sp>
-        <p:nvSpPr>
-          <p:cNvPr id="4" name="Text 1"/>
-          <p:cNvSpPr/>
-          <p:nvPr/>
-        </p:nvSpPr>
-        <p:spPr>
-          <a:xfrm>
-            <a:off x="5349240" y="1005840"/>
-            <a:ext cx="6522415" cy="731520"/>
-          </a:xfrm>
-          <a:prstGeom prst="rect">
-            <a:avLst/>
-          </a:prstGeom>
-          <a:noFill/>
-          <a:ln/>
-        </p:spPr>
-        <p:txBody>
-          <a:bodyPr wrap="square" lIns="0" tIns="0" rIns="0" bIns="0" rtlCol="0" anchor="ctr">
-            <a:normAutofit/>
-          </a:bodyPr>
-          <a:lstStyle/>
-          <a:p>
-            <a:pPr algn="ctr" indent="0" marL="0">
-              <a:buNone/>
-            </a:pPr>
-            <a:r>
-              <a:rPr lang="en-US" sz="3600" b="1" dirty="0">
-                <a:solidFill>
-                  <a:srgbClr val="990011"/>
-                </a:solidFill>
-                <a:latin typeface="Times New Roman" pitchFamily="34" charset="0"/>
-                <a:ea typeface="Times New Roman" pitchFamily="34" charset="-122"/>
-                <a:cs typeface="Times New Roman" pitchFamily="34" charset="-120"/>
-              </a:rPr>
-              <a:t>Next Lesson</a:t>
-            </a:r>
-            <a:endParaRPr lang="en-US" sz="3600" dirty="0"/>
-          </a:p>
-        </p:txBody>
-      </p:sp>
-      <p:sp>
-        <p:nvSpPr>
-          <p:cNvPr id="5" name="Text 2"/>
-          <p:cNvSpPr/>
-          <p:nvPr/>
-        </p:nvSpPr>
-        <p:spPr>
-          <a:xfrm>
-            <a:off x="5349240" y="1783080"/>
-            <a:ext cx="6522415" cy="4663440"/>
-          </a:xfrm>
-          <a:prstGeom prst="rect">
-            <a:avLst/>
-          </a:prstGeom>
-          <a:noFill/>
-          <a:ln/>
-        </p:spPr>
-        <p:txBody>
-          <a:bodyPr wrap="square" lIns="0" tIns="0" rIns="0" bIns="0" rtlCol="0" anchor="ctr"/>
-          <a:lstStyle/>
-          <a:p>
-            <a:pPr algn="ctr" indent="0" marL="0">
-              <a:spcAft>
-                <a:spcPts val="800"/>
-              </a:spcAft>
-              <a:buNone/>
-            </a:pPr>
-            <a:r>
-              <a:rPr lang="en-US" sz="4000" b="1" dirty="0">
-                <a:solidFill>
-                  <a:srgbClr val="111111"/>
-                </a:solidFill>
-                <a:latin typeface="Times New Roman" pitchFamily="34" charset="0"/>
-                <a:ea typeface="Times New Roman" pitchFamily="34" charset="-122"/>
-                <a:cs typeface="Times New Roman" pitchFamily="34" charset="-120"/>
-              </a:rPr>
-              <a:t>Our next lesson will be on:</a:t>
-            </a:r>
-            <a:endParaRPr lang="en-US" sz="4000" dirty="0"/>
-          </a:p>
-          <a:p>
-            <a:pPr algn="ctr" indent="0" marL="0">
-              <a:spcAft>
-                <a:spcPts val="800"/>
-              </a:spcAft>
-              <a:buNone/>
-            </a:pPr>
-            <a:r>
-              <a:rPr lang="en-US" sz="4000" b="1" dirty="0">
-                <a:solidFill>
-                  <a:srgbClr val="990011"/>
-                </a:solidFill>
-                <a:latin typeface="Times New Roman" pitchFamily="34" charset="0"/>
-                <a:ea typeface="Times New Roman" pitchFamily="34" charset="-122"/>
-                <a:cs typeface="Times New Roman" pitchFamily="34" charset="-120"/>
-              </a:rPr>
-              <a:t>Lesson 3: Man in the Equatorial Zone</a:t>
-            </a:r>
-            <a:endParaRPr lang="en-US" sz="4000" dirty="0"/>
-          </a:p>
-        </p:txBody>
-      </p:sp>
-      <p:sp>
-        <p:nvSpPr>
-          <p:cNvPr id="25" name="Slide Number Placeholder 0"/>
-          <p:cNvSpPr>
-            <a:spLocks noGrp="1"/>
-          </p:cNvSpPr>
-          <p:nvPr>
-            <p:ph type="sldNum" sz="quarter" idx="4294967295"/>
-          </p:nvPr>
-        </p:nvSpPr>
-        <p:spPr>
-          <a:xfrm>
-            <a:off x="27432" y="91440"/>
-            <a:ext cx="585216" cy="475488"/>
-          </a:xfrm>
-          <a:prstGeom prst="rect">
-            <a:avLst/>
-          </a:prstGeom>
-          <a:extLst>
-            <a:ext uri="{C572A759-6A51-4108-AA02-DFA0A04FC94B}">
-              <ma14:wrappingTextBoxFlag xmlns:ma14="http://schemas.microsoft.com/office/mac/drawingml/2011/main" val="0"/>
-            </a:ext>
-          </a:extLst>
-        </p:spPr>
-        <p:txBody>
-          <a:bodyPr/>
-          <a:lstStyle>
-            <a:lvl1pPr>
-              <a:defRPr sz="2000">
-                <a:solidFill>
-                  <a:srgbClr val="FFFFFF"/>
-                </a:solidFill>
-                <a:latin typeface="Calibri"/>
-                <a:ea typeface="Calibri"/>
-                <a:cs typeface="Calibri"/>
-              </a:defRPr>
-            </a:lvl1pPr>
-          </a:lstStyle>
-          <a:p>
-            <a:pPr algn="ctr"/>
-            <a:fld id="{F7021451-1387-4CA6-816F-3879F97B5CBC}" type="slidenum">
-              <a:rPr b="1" lang="en-US"/>
-              <a:t>47</a:t>
-            </a:fld>
-            <a:endParaRPr lang="en-US"/>
-          </a:p>
-        </p:txBody>
-      </p:sp>
-    </p:spTree>
-  </p:cSld>
-  <p:clrMapOvr>
-    <a:masterClrMapping/>
-  </p:clrMapOvr>
-</p:sld>
-</file>
-
-<file path=ppt/slides/slide48.xml><?xml version="1.0" encoding="utf-8"?>
-<p:sld xmlns:a="http://schemas.openxmlformats.org/drawingml/2006/main" xmlns:r="http://schemas.openxmlformats.org/officeDocument/2006/relationships" xmlns:p="http://schemas.openxmlformats.org/presentationml/2006/main">
-  <p:cSld name="Slide 48">
-    <p:spTree>
-      <p:nvGrpSpPr>
-        <p:cNvPr id="1" name=""/>
-        <p:cNvGrpSpPr/>
-        <p:nvPr/>
-      </p:nvGrpSpPr>
-      <p:grpSpPr>
-        <a:xfrm>
-          <a:off x="0" y="0"/>
-          <a:ext cx="0" cy="0"/>
-          <a:chOff x="0" y="0"/>
-          <a:chExt cx="0" cy="0"/>
-        </a:xfrm>
-      </p:grpSpPr>
-      <p:sp>
-        <p:nvSpPr>
-          <p:cNvPr id="2" name="Text 0"/>
-          <p:cNvSpPr/>
-          <p:nvPr/>
-        </p:nvSpPr>
-        <p:spPr>
-          <a:xfrm>
-            <a:off x="457200" y="713232"/>
-            <a:ext cx="11368735" cy="274320"/>
-          </a:xfrm>
-          <a:prstGeom prst="rect">
-            <a:avLst/>
-          </a:prstGeom>
-          <a:noFill/>
-          <a:ln/>
-        </p:spPr>
-        <p:txBody>
-          <a:bodyPr wrap="square" lIns="0" tIns="0" rIns="0" bIns="0" rtlCol="0" anchor="ctr"/>
-          <a:lstStyle/>
-          <a:p>
-            <a:pPr algn="r" indent="0" marL="0">
-              <a:buNone/>
-            </a:pPr>
-            <a:r>
-              <a:rPr lang="en-US" sz="1400" b="1" dirty="0">
-                <a:solidFill>
-                  <a:srgbClr val="1C3F6E"/>
-                </a:solidFill>
-                <a:latin typeface="Calibri" pitchFamily="34" charset="0"/>
-                <a:ea typeface="Calibri" pitchFamily="34" charset="-122"/>
-                <a:cs typeface="Calibri" pitchFamily="34" charset="-120"/>
-              </a:rPr>
               <a:t>BILINGUAL GAME</a:t>
             </a:r>
             <a:endParaRPr lang="en-US" sz="1400" dirty="0"/>
@@ -16925,7 +16737,7 @@
       </p:sp>
       <p:graphicFrame>
         <p:nvGraphicFramePr>
-          <p:cNvPr id="49" name="Table 0"/>
+          <p:cNvPr id="48" name="Table 0"/>
           <p:cNvGraphicFramePr>
             <a:graphicFrameLocks noGrp="1"/>
           </p:cNvGraphicFramePr>
@@ -17961,7 +17773,7 @@
             <a:pPr algn="ctr"/>
             <a:fld id="{F7021451-1387-4CA6-816F-3879F97B5CBC}" type="slidenum">
               <a:rPr b="1" lang="en-US"/>
-              <a:t>48</a:t>
+              <a:t>47</a:t>
             </a:fld>
             <a:endParaRPr lang="en-US"/>
           </a:p>
@@ -17975,9 +17787,9 @@
 </p:sld>
 </file>
 
-<file path=ppt/slides/slide49.xml><?xml version="1.0" encoding="utf-8"?>
+<file path=ppt/slides/slide48.xml><?xml version="1.0" encoding="utf-8"?>
 <p:sld xmlns:a="http://schemas.openxmlformats.org/drawingml/2006/main" xmlns:r="http://schemas.openxmlformats.org/officeDocument/2006/relationships" xmlns:p="http://schemas.openxmlformats.org/presentationml/2006/main">
-  <p:cSld name="Slide 49">
+  <p:cSld name="Slide 48">
     <p:spTree>
       <p:nvGrpSpPr>
         <p:cNvPr id="1" name=""/>
@@ -18072,7 +17884,7 @@
       </p:sp>
       <p:graphicFrame>
         <p:nvGraphicFramePr>
-          <p:cNvPr id="50" name="Table 0"/>
+          <p:cNvPr id="49" name="Table 0"/>
           <p:cNvGraphicFramePr>
             <a:graphicFrameLocks noGrp="1"/>
           </p:cNvGraphicFramePr>
@@ -18458,7 +18270,7 @@
                           <a:ea typeface="Calibri" pitchFamily="34" charset="-122"/>
                           <a:cs typeface="Calibri" pitchFamily="34" charset="-120"/>
                         </a:rPr>
-                        <a:t>Recall the notion of population density. Calculate the density of regions of Cameroon. Identify areas of dense, moderate and low density on a map.</a:t>
+                        <a:t>Recall the notion of population density. Calculate the density of the regions of Cameroon. Identify areas of dense, moderate and low density on a map.</a:t>
                       </a:r>
                       <a:endParaRPr lang="en-US" sz="1600" dirty="0">
                         <a:latin typeface="Calibri" charset="0"/>
@@ -18694,7 +18506,7 @@
             <a:pPr algn="ctr"/>
             <a:fld id="{F7021451-1387-4CA6-816F-3879F97B5CBC}" type="slidenum">
               <a:rPr b="1" lang="en-US"/>
-              <a:t>49</a:t>
+              <a:t>48</a:t>
             </a:fld>
             <a:endParaRPr lang="en-US"/>
           </a:p>
@@ -18708,9 +18520,9 @@
 </p:sld>
 </file>
 
-<file path=ppt/slides/slide5.xml><?xml version="1.0" encoding="utf-8"?>
+<file path=ppt/slides/slide49.xml><?xml version="1.0" encoding="utf-8"?>
 <p:sld xmlns:a="http://schemas.openxmlformats.org/drawingml/2006/main" xmlns:r="http://schemas.openxmlformats.org/officeDocument/2006/relationships" xmlns:p="http://schemas.openxmlformats.org/presentationml/2006/main">
-  <p:cSld name="Slide 5">
+  <p:cSld name="Slide 49">
     <p:spTree>
       <p:nvGrpSpPr>
         <p:cNvPr id="1" name=""/>
@@ -18758,225 +18570,6 @@
                 <a:ea typeface="Calibri" pitchFamily="34" charset="-122"/>
                 <a:cs typeface="Calibri" pitchFamily="34" charset="-120"/>
               </a:rPr>
-              <a:t>HOMEWORK CORRECTION</a:t>
-            </a:r>
-            <a:endParaRPr lang="en-US" sz="1400" dirty="0"/>
-          </a:p>
-        </p:txBody>
-      </p:sp>
-      <p:pic>
-        <p:nvPicPr>
-          <p:cNvPr id="3" name="Image 0" descr="/home/claude/f4/img/minesec_sheet.png">    </p:cNvPr>
-          <p:cNvPicPr>
-            <a:picLocks noChangeAspect="1"/>
-          </p:cNvPicPr>
-          <p:nvPr/>
-        </p:nvPicPr>
-        <p:blipFill>
-          <a:blip r:embed="rId1"/>
-          <a:stretch>
-            <a:fillRect/>
-          </a:stretch>
-        </p:blipFill>
-        <p:spPr>
-          <a:xfrm>
-            <a:off x="0" y="658368"/>
-            <a:ext cx="5120640" cy="5833872"/>
-          </a:xfrm>
-          <a:prstGeom prst="rect">
-            <a:avLst/>
-          </a:prstGeom>
-        </p:spPr>
-      </p:pic>
-      <p:sp>
-        <p:nvSpPr>
-          <p:cNvPr id="4" name="Text 1"/>
-          <p:cNvSpPr/>
-          <p:nvPr/>
-        </p:nvSpPr>
-        <p:spPr>
-          <a:xfrm>
-            <a:off x="5349240" y="1005840"/>
-            <a:ext cx="6522415" cy="731520"/>
-          </a:xfrm>
-          <a:prstGeom prst="rect">
-            <a:avLst/>
-          </a:prstGeom>
-          <a:noFill/>
-          <a:ln/>
-        </p:spPr>
-        <p:txBody>
-          <a:bodyPr wrap="square" lIns="0" tIns="0" rIns="0" bIns="0" rtlCol="0" anchor="ctr">
-            <a:normAutofit/>
-          </a:bodyPr>
-          <a:lstStyle/>
-          <a:p>
-            <a:pPr algn="ctr" indent="0" marL="0">
-              <a:buNone/>
-            </a:pPr>
-            <a:r>
-              <a:rPr lang="en-US" sz="3600" b="1" dirty="0">
-                <a:solidFill>
-                  <a:srgbClr val="990011"/>
-                </a:solidFill>
-                <a:latin typeface="Times New Roman" pitchFamily="34" charset="0"/>
-                <a:ea typeface="Times New Roman" pitchFamily="34" charset="-122"/>
-                <a:cs typeface="Times New Roman" pitchFamily="34" charset="-120"/>
-              </a:rPr>
-              <a:t>Correction: Possible Answer</a:t>
-            </a:r>
-            <a:endParaRPr lang="en-US" sz="3600" dirty="0"/>
-          </a:p>
-        </p:txBody>
-      </p:sp>
-      <p:sp>
-        <p:nvSpPr>
-          <p:cNvPr id="5" name="Text 2"/>
-          <p:cNvSpPr/>
-          <p:nvPr/>
-        </p:nvSpPr>
-        <p:spPr>
-          <a:xfrm>
-            <a:off x="5349240" y="1783080"/>
-            <a:ext cx="6522415" cy="4663440"/>
-          </a:xfrm>
-          <a:prstGeom prst="rect">
-            <a:avLst/>
-          </a:prstGeom>
-          <a:noFill/>
-          <a:ln/>
-        </p:spPr>
-        <p:txBody>
-          <a:bodyPr wrap="square" lIns="0" tIns="0" rIns="0" bIns="0" rtlCol="0" anchor="t"/>
-          <a:lstStyle/>
-          <a:p>
-            <a:pPr algn="l" indent="0" marL="0">
-              <a:spcAft>
-                <a:spcPts val="800"/>
-              </a:spcAft>
-              <a:buNone/>
-            </a:pPr>
-            <a:r>
-              <a:rPr lang="en-US" sz="4000" dirty="0">
-                <a:solidFill>
-                  <a:srgbClr val="111111"/>
-                </a:solidFill>
-                <a:latin typeface="Times New Roman" pitchFamily="34" charset="0"/>
-                <a:ea typeface="Times New Roman" pitchFamily="34" charset="-122"/>
-                <a:cs typeface="Times New Roman" pitchFamily="34" charset="-120"/>
-              </a:rPr>
-              <a:t>Example for the North Region: about 3,000,000 people ÷ 66,000 km² ≈ 45 people per km².</a:t>
-            </a:r>
-            <a:endParaRPr lang="en-US" sz="4000" dirty="0"/>
-          </a:p>
-        </p:txBody>
-      </p:sp>
-      <p:sp>
-        <p:nvSpPr>
-          <p:cNvPr id="25" name="Slide Number Placeholder 0"/>
-          <p:cNvSpPr>
-            <a:spLocks noGrp="1"/>
-          </p:cNvSpPr>
-          <p:nvPr>
-            <p:ph type="sldNum" sz="quarter" idx="4294967295"/>
-          </p:nvPr>
-        </p:nvSpPr>
-        <p:spPr>
-          <a:xfrm>
-            <a:off x="27432" y="91440"/>
-            <a:ext cx="585216" cy="475488"/>
-          </a:xfrm>
-          <a:prstGeom prst="rect">
-            <a:avLst/>
-          </a:prstGeom>
-          <a:extLst>
-            <a:ext uri="{C572A759-6A51-4108-AA02-DFA0A04FC94B}">
-              <ma14:wrappingTextBoxFlag xmlns:ma14="http://schemas.microsoft.com/office/mac/drawingml/2011/main" val="0"/>
-            </a:ext>
-          </a:extLst>
-        </p:spPr>
-        <p:txBody>
-          <a:bodyPr/>
-          <a:lstStyle>
-            <a:lvl1pPr>
-              <a:defRPr sz="2000">
-                <a:solidFill>
-                  <a:srgbClr val="FFFFFF"/>
-                </a:solidFill>
-                <a:latin typeface="Calibri"/>
-                <a:ea typeface="Calibri"/>
-                <a:cs typeface="Calibri"/>
-              </a:defRPr>
-            </a:lvl1pPr>
-          </a:lstStyle>
-          <a:p>
-            <a:pPr algn="ctr"/>
-            <a:fld id="{F7021451-1387-4CA6-816F-3879F97B5CBC}" type="slidenum">
-              <a:rPr b="1" lang="en-US"/>
-              <a:t>5</a:t>
-            </a:fld>
-            <a:endParaRPr lang="en-US"/>
-          </a:p>
-        </p:txBody>
-      </p:sp>
-    </p:spTree>
-  </p:cSld>
-  <p:clrMapOvr>
-    <a:masterClrMapping/>
-  </p:clrMapOvr>
-</p:sld>
-</file>
-
-<file path=ppt/slides/slide50.xml><?xml version="1.0" encoding="utf-8"?>
-<p:sld xmlns:a="http://schemas.openxmlformats.org/drawingml/2006/main" xmlns:r="http://schemas.openxmlformats.org/officeDocument/2006/relationships" xmlns:p="http://schemas.openxmlformats.org/presentationml/2006/main">
-  <p:cSld name="Slide 50">
-    <p:spTree>
-      <p:nvGrpSpPr>
-        <p:cNvPr id="1" name=""/>
-        <p:cNvGrpSpPr/>
-        <p:nvPr/>
-      </p:nvGrpSpPr>
-      <p:grpSpPr>
-        <a:xfrm>
-          <a:off x="0" y="0"/>
-          <a:ext cx="0" cy="0"/>
-          <a:chOff x="0" y="0"/>
-          <a:chExt cx="0" cy="0"/>
-        </a:xfrm>
-      </p:grpSpPr>
-      <p:sp>
-        <p:nvSpPr>
-          <p:cNvPr id="2" name="Text 0"/>
-          <p:cNvSpPr/>
-          <p:nvPr/>
-        </p:nvSpPr>
-        <p:spPr>
-          <a:xfrm>
-            <a:off x="457200" y="713232"/>
-            <a:ext cx="11368735" cy="274320"/>
-          </a:xfrm>
-          <a:prstGeom prst="rect">
-            <a:avLst/>
-          </a:prstGeom>
-          <a:noFill/>
-          <a:ln/>
-        </p:spPr>
-        <p:txBody>
-          <a:bodyPr wrap="square" lIns="0" tIns="0" rIns="0" bIns="0" rtlCol="0" anchor="ctr"/>
-          <a:lstStyle/>
-          <a:p>
-            <a:pPr algn="r" indent="0" marL="0">
-              <a:buNone/>
-            </a:pPr>
-            <a:r>
-              <a:rPr lang="en-US" sz="1400" b="1" dirty="0">
-                <a:solidFill>
-                  <a:srgbClr val="1C3F6E"/>
-                </a:solidFill>
-                <a:latin typeface="Calibri" pitchFamily="34" charset="0"/>
-                <a:ea typeface="Calibri" pitchFamily="34" charset="-122"/>
-                <a:cs typeface="Calibri" pitchFamily="34" charset="-120"/>
-              </a:rPr>
               <a:t>LOGBOOK</a:t>
             </a:r>
             <a:endParaRPr lang="en-US" sz="1400" dirty="0"/>
@@ -19024,7 +18617,7 @@
       </p:sp>
       <p:graphicFrame>
         <p:nvGraphicFramePr>
-          <p:cNvPr id="51" name="Table 0"/>
+          <p:cNvPr id="50" name="Table 0"/>
           <p:cNvGraphicFramePr>
             <a:graphicFrameLocks noGrp="1"/>
           </p:cNvGraphicFramePr>
@@ -19134,7 +18727,7 @@
                           <a:ea typeface="Calibri" pitchFamily="34" charset="-122"/>
                           <a:cs typeface="Calibri" pitchFamily="34" charset="-120"/>
                         </a:rPr>
-                        <a:t>DEFINITIONS; Calculation; Areas of Density in Cameroon.</a:t>
+                        <a:t>DEFINITIONS; Calculation of Densities; Areas of Dense, Moderate and Low Density.</a:t>
                       </a:r>
                       <a:endParaRPr lang="en-US" sz="1600" dirty="0">
                         <a:latin typeface="Calibri" charset="0"/>
@@ -19410,7 +19003,7 @@
                           <a:ea typeface="Calibri" pitchFamily="34" charset="-122"/>
                           <a:cs typeface="Calibri" pitchFamily="34" charset="-120"/>
                         </a:rPr>
-                        <a:t>Calculate the density of the North Region: about 3,000,000 people on 66,000 km².</a:t>
+                        <a:t>Calculate the density of the Far North: about 4,450,000 people on 34,263 km².</a:t>
                       </a:r>
                       <a:endParaRPr lang="en-US" sz="1600" dirty="0">
                         <a:latin typeface="Calibri" charset="0"/>
@@ -19784,6 +19377,550 @@
             <a:pPr algn="ctr"/>
             <a:fld id="{F7021451-1387-4CA6-816F-3879F97B5CBC}" type="slidenum">
               <a:rPr b="1" lang="en-US"/>
+              <a:t>49</a:t>
+            </a:fld>
+            <a:endParaRPr lang="en-US"/>
+          </a:p>
+        </p:txBody>
+      </p:sp>
+    </p:spTree>
+  </p:cSld>
+  <p:clrMapOvr>
+    <a:masterClrMapping/>
+  </p:clrMapOvr>
+</p:sld>
+</file>
+
+<file path=ppt/slides/slide5.xml><?xml version="1.0" encoding="utf-8"?>
+<p:sld xmlns:a="http://schemas.openxmlformats.org/drawingml/2006/main" xmlns:r="http://schemas.openxmlformats.org/officeDocument/2006/relationships" xmlns:p="http://schemas.openxmlformats.org/presentationml/2006/main">
+  <p:cSld name="Slide 5">
+    <p:spTree>
+      <p:nvGrpSpPr>
+        <p:cNvPr id="1" name=""/>
+        <p:cNvGrpSpPr/>
+        <p:nvPr/>
+      </p:nvGrpSpPr>
+      <p:grpSpPr>
+        <a:xfrm>
+          <a:off x="0" y="0"/>
+          <a:ext cx="0" cy="0"/>
+          <a:chOff x="0" y="0"/>
+          <a:chExt cx="0" cy="0"/>
+        </a:xfrm>
+      </p:grpSpPr>
+      <p:sp>
+        <p:nvSpPr>
+          <p:cNvPr id="2" name="Text 0"/>
+          <p:cNvSpPr/>
+          <p:nvPr/>
+        </p:nvSpPr>
+        <p:spPr>
+          <a:xfrm>
+            <a:off x="457200" y="713232"/>
+            <a:ext cx="11368735" cy="274320"/>
+          </a:xfrm>
+          <a:prstGeom prst="rect">
+            <a:avLst/>
+          </a:prstGeom>
+          <a:noFill/>
+          <a:ln/>
+        </p:spPr>
+        <p:txBody>
+          <a:bodyPr wrap="square" lIns="0" tIns="0" rIns="0" bIns="0" rtlCol="0" anchor="ctr"/>
+          <a:lstStyle/>
+          <a:p>
+            <a:pPr algn="r" indent="0" marL="0">
+              <a:buNone/>
+            </a:pPr>
+            <a:r>
+              <a:rPr lang="en-US" sz="1400" b="1" dirty="0">
+                <a:solidFill>
+                  <a:srgbClr val="1C3F6E"/>
+                </a:solidFill>
+                <a:latin typeface="Calibri" pitchFamily="34" charset="0"/>
+                <a:ea typeface="Calibri" pitchFamily="34" charset="-122"/>
+                <a:cs typeface="Calibri" pitchFamily="34" charset="-120"/>
+              </a:rPr>
+              <a:t>HOMEWORK CORRECTION</a:t>
+            </a:r>
+            <a:endParaRPr lang="en-US" sz="1400" dirty="0"/>
+          </a:p>
+        </p:txBody>
+      </p:sp>
+      <p:pic>
+        <p:nvPicPr>
+          <p:cNvPr id="3" name="Image 0" descr="/home/claude/f4/img/minesec_sheet.png">    </p:cNvPr>
+          <p:cNvPicPr>
+            <a:picLocks noChangeAspect="1"/>
+          </p:cNvPicPr>
+          <p:nvPr/>
+        </p:nvPicPr>
+        <p:blipFill>
+          <a:blip r:embed="rId1"/>
+          <a:stretch>
+            <a:fillRect/>
+          </a:stretch>
+        </p:blipFill>
+        <p:spPr>
+          <a:xfrm>
+            <a:off x="0" y="658368"/>
+            <a:ext cx="5120640" cy="5833872"/>
+          </a:xfrm>
+          <a:prstGeom prst="rect">
+            <a:avLst/>
+          </a:prstGeom>
+        </p:spPr>
+      </p:pic>
+      <p:sp>
+        <p:nvSpPr>
+          <p:cNvPr id="4" name="Text 1"/>
+          <p:cNvSpPr/>
+          <p:nvPr/>
+        </p:nvSpPr>
+        <p:spPr>
+          <a:xfrm>
+            <a:off x="5349240" y="1005840"/>
+            <a:ext cx="6522415" cy="731520"/>
+          </a:xfrm>
+          <a:prstGeom prst="rect">
+            <a:avLst/>
+          </a:prstGeom>
+          <a:noFill/>
+          <a:ln/>
+        </p:spPr>
+        <p:txBody>
+          <a:bodyPr wrap="square" lIns="0" tIns="0" rIns="0" bIns="0" rtlCol="0" anchor="ctr">
+            <a:normAutofit/>
+          </a:bodyPr>
+          <a:lstStyle/>
+          <a:p>
+            <a:pPr algn="ctr" indent="0" marL="0">
+              <a:buNone/>
+            </a:pPr>
+            <a:r>
+              <a:rPr lang="en-US" sz="3600" b="1" dirty="0">
+                <a:solidFill>
+                  <a:srgbClr val="990011"/>
+                </a:solidFill>
+                <a:latin typeface="Times New Roman" pitchFamily="34" charset="0"/>
+                <a:ea typeface="Times New Roman" pitchFamily="34" charset="-122"/>
+                <a:cs typeface="Times New Roman" pitchFamily="34" charset="-120"/>
+              </a:rPr>
+              <a:t>Correction: Possible Answer</a:t>
+            </a:r>
+            <a:endParaRPr lang="en-US" sz="3600" dirty="0"/>
+          </a:p>
+        </p:txBody>
+      </p:sp>
+      <p:sp>
+        <p:nvSpPr>
+          <p:cNvPr id="5" name="Text 2"/>
+          <p:cNvSpPr/>
+          <p:nvPr/>
+        </p:nvSpPr>
+        <p:spPr>
+          <a:xfrm>
+            <a:off x="5349240" y="1783080"/>
+            <a:ext cx="6522415" cy="4663440"/>
+          </a:xfrm>
+          <a:prstGeom prst="rect">
+            <a:avLst/>
+          </a:prstGeom>
+          <a:noFill/>
+          <a:ln/>
+        </p:spPr>
+        <p:txBody>
+          <a:bodyPr wrap="square" lIns="0" tIns="0" rIns="0" bIns="0" rtlCol="0" anchor="t"/>
+          <a:lstStyle/>
+          <a:p>
+            <a:pPr algn="l" indent="0" marL="0">
+              <a:spcAft>
+                <a:spcPts val="800"/>
+              </a:spcAft>
+              <a:buNone/>
+            </a:pPr>
+            <a:r>
+              <a:rPr lang="en-US" sz="4000" dirty="0">
+                <a:solidFill>
+                  <a:srgbClr val="111111"/>
+                </a:solidFill>
+                <a:latin typeface="Times New Roman" pitchFamily="34" charset="0"/>
+                <a:ea typeface="Times New Roman" pitchFamily="34" charset="-122"/>
+                <a:cs typeface="Times New Roman" pitchFamily="34" charset="-120"/>
+              </a:rPr>
+              <a:t>Example for the North Region: about 2,800,000 people ÷ 66,000 km² ≈ 42 people per km².</a:t>
+            </a:r>
+            <a:endParaRPr lang="en-US" sz="4000" dirty="0"/>
+          </a:p>
+        </p:txBody>
+      </p:sp>
+      <p:sp>
+        <p:nvSpPr>
+          <p:cNvPr id="25" name="Slide Number Placeholder 0"/>
+          <p:cNvSpPr>
+            <a:spLocks noGrp="1"/>
+          </p:cNvSpPr>
+          <p:nvPr>
+            <p:ph type="sldNum" sz="quarter" idx="4294967295"/>
+          </p:nvPr>
+        </p:nvSpPr>
+        <p:spPr>
+          <a:xfrm>
+            <a:off x="27432" y="91440"/>
+            <a:ext cx="585216" cy="475488"/>
+          </a:xfrm>
+          <a:prstGeom prst="rect">
+            <a:avLst/>
+          </a:prstGeom>
+          <a:extLst>
+            <a:ext uri="{C572A759-6A51-4108-AA02-DFA0A04FC94B}">
+              <ma14:wrappingTextBoxFlag xmlns:ma14="http://schemas.microsoft.com/office/mac/drawingml/2011/main" val="0"/>
+            </a:ext>
+          </a:extLst>
+        </p:spPr>
+        <p:txBody>
+          <a:bodyPr/>
+          <a:lstStyle>
+            <a:lvl1pPr>
+              <a:defRPr sz="2000">
+                <a:solidFill>
+                  <a:srgbClr val="FFFFFF"/>
+                </a:solidFill>
+                <a:latin typeface="Calibri"/>
+                <a:ea typeface="Calibri"/>
+                <a:cs typeface="Calibri"/>
+              </a:defRPr>
+            </a:lvl1pPr>
+          </a:lstStyle>
+          <a:p>
+            <a:pPr algn="ctr"/>
+            <a:fld id="{F7021451-1387-4CA6-816F-3879F97B5CBC}" type="slidenum">
+              <a:rPr b="1" lang="en-US"/>
+              <a:t>5</a:t>
+            </a:fld>
+            <a:endParaRPr lang="en-US"/>
+          </a:p>
+        </p:txBody>
+      </p:sp>
+    </p:spTree>
+  </p:cSld>
+  <p:clrMapOvr>
+    <a:masterClrMapping/>
+  </p:clrMapOvr>
+</p:sld>
+</file>
+
+<file path=ppt/slides/slide50.xml><?xml version="1.0" encoding="utf-8"?>
+<p:sld xmlns:a="http://schemas.openxmlformats.org/drawingml/2006/main" xmlns:r="http://schemas.openxmlformats.org/officeDocument/2006/relationships" xmlns:p="http://schemas.openxmlformats.org/presentationml/2006/main">
+  <p:cSld name="Slide 50">
+    <p:spTree>
+      <p:nvGrpSpPr>
+        <p:cNvPr id="1" name=""/>
+        <p:cNvGrpSpPr/>
+        <p:nvPr/>
+      </p:nvGrpSpPr>
+      <p:grpSpPr>
+        <a:xfrm>
+          <a:off x="0" y="0"/>
+          <a:ext cx="0" cy="0"/>
+          <a:chOff x="0" y="0"/>
+          <a:chExt cx="0" cy="0"/>
+        </a:xfrm>
+      </p:grpSpPr>
+      <p:sp>
+        <p:nvSpPr>
+          <p:cNvPr id="2" name="Text 0"/>
+          <p:cNvSpPr/>
+          <p:nvPr/>
+        </p:nvSpPr>
+        <p:spPr>
+          <a:xfrm>
+            <a:off x="457200" y="713232"/>
+            <a:ext cx="11368735" cy="274320"/>
+          </a:xfrm>
+          <a:prstGeom prst="rect">
+            <a:avLst/>
+          </a:prstGeom>
+          <a:noFill/>
+          <a:ln/>
+        </p:spPr>
+        <p:txBody>
+          <a:bodyPr wrap="square" lIns="0" tIns="0" rIns="0" bIns="0" rtlCol="0" anchor="ctr"/>
+          <a:lstStyle/>
+          <a:p>
+            <a:pPr algn="r" indent="0" marL="0">
+              <a:buNone/>
+            </a:pPr>
+            <a:r>
+              <a:rPr lang="en-US" sz="1400" b="1" dirty="0">
+                <a:solidFill>
+                  <a:srgbClr val="1C3F6E"/>
+                </a:solidFill>
+                <a:latin typeface="Calibri" pitchFamily="34" charset="0"/>
+                <a:ea typeface="Calibri" pitchFamily="34" charset="-122"/>
+                <a:cs typeface="Calibri" pitchFamily="34" charset="-120"/>
+              </a:rPr>
+              <a:t>TEACHER'S NOTE</a:t>
+            </a:r>
+            <a:endParaRPr lang="en-US" sz="1400" dirty="0"/>
+          </a:p>
+        </p:txBody>
+      </p:sp>
+      <p:pic>
+        <p:nvPicPr>
+          <p:cNvPr id="3" name="Image 0" descr="/home/claude/f4/img/minesec_sheet.png">    </p:cNvPr>
+          <p:cNvPicPr>
+            <a:picLocks noChangeAspect="1"/>
+          </p:cNvPicPr>
+          <p:nvPr/>
+        </p:nvPicPr>
+        <p:blipFill>
+          <a:blip r:embed="rId1"/>
+          <a:stretch>
+            <a:fillRect/>
+          </a:stretch>
+        </p:blipFill>
+        <p:spPr>
+          <a:xfrm>
+            <a:off x="0" y="658368"/>
+            <a:ext cx="3840480" cy="5833872"/>
+          </a:xfrm>
+          <a:prstGeom prst="rect">
+            <a:avLst/>
+          </a:prstGeom>
+        </p:spPr>
+      </p:pic>
+      <p:sp>
+        <p:nvSpPr>
+          <p:cNvPr id="4" name="Text 1"/>
+          <p:cNvSpPr/>
+          <p:nvPr/>
+        </p:nvSpPr>
+        <p:spPr>
+          <a:xfrm>
+            <a:off x="4069080" y="1005840"/>
+            <a:ext cx="7802575" cy="731520"/>
+          </a:xfrm>
+          <a:prstGeom prst="rect">
+            <a:avLst/>
+          </a:prstGeom>
+          <a:noFill/>
+          <a:ln/>
+        </p:spPr>
+        <p:txBody>
+          <a:bodyPr wrap="square" lIns="0" tIns="0" rIns="0" bIns="0" rtlCol="0" anchor="ctr">
+            <a:normAutofit/>
+          </a:bodyPr>
+          <a:lstStyle/>
+          <a:p>
+            <a:pPr algn="ctr" indent="0" marL="0">
+              <a:buNone/>
+            </a:pPr>
+            <a:r>
+              <a:rPr lang="en-US" sz="3600" b="1" dirty="0">
+                <a:solidFill>
+                  <a:srgbClr val="990011"/>
+                </a:solidFill>
+                <a:latin typeface="Times New Roman" pitchFamily="34" charset="0"/>
+                <a:ea typeface="Times New Roman" pitchFamily="34" charset="-122"/>
+                <a:cs typeface="Times New Roman" pitchFamily="34" charset="-120"/>
+              </a:rPr>
+              <a:t>Teacher's Note</a:t>
+            </a:r>
+            <a:endParaRPr lang="en-US" sz="3600" dirty="0"/>
+          </a:p>
+        </p:txBody>
+      </p:sp>
+      <p:sp>
+        <p:nvSpPr>
+          <p:cNvPr id="5" name="Text 2"/>
+          <p:cNvSpPr/>
+          <p:nvPr/>
+        </p:nvSpPr>
+        <p:spPr>
+          <a:xfrm>
+            <a:off x="4069080" y="1783080"/>
+            <a:ext cx="7802575" cy="4663440"/>
+          </a:xfrm>
+          <a:prstGeom prst="rect">
+            <a:avLst/>
+          </a:prstGeom>
+          <a:noFill/>
+          <a:ln/>
+        </p:spPr>
+        <p:txBody>
+          <a:bodyPr wrap="square" lIns="0" tIns="0" rIns="0" bIns="0" rtlCol="0" anchor="t"/>
+          <a:lstStyle/>
+          <a:p>
+            <a:pPr algn="l" marL="342900" indent="-342900">
+              <a:spcAft>
+                <a:spcPts val="800"/>
+              </a:spcAft>
+              <a:buSzPct val="100000"/>
+              <a:buChar char="•"/>
+            </a:pPr>
+            <a:r>
+              <a:rPr lang="en-US" sz="2000" dirty="0">
+                <a:solidFill>
+                  <a:srgbClr val="111111"/>
+                </a:solidFill>
+                <a:latin typeface="Calibri" pitchFamily="34" charset="0"/>
+                <a:ea typeface="Calibri" pitchFamily="34" charset="-122"/>
+                <a:cs typeface="Calibri" pitchFamily="34" charset="-120"/>
+              </a:rPr>
+              <a:t>Timing: Homework correction, plan, objectives 8 min | Recall, situation, action 10 min | 5 activities 30 min | Board summary (copying) 30 min | Evaluation, remediation 10 min | Homework, next lesson 5 min | Logbook 7 min</a:t>
+            </a:r>
+            <a:endParaRPr lang="en-US" sz="2000" dirty="0"/>
+          </a:p>
+          <a:p>
+            <a:pPr algn="l" marL="342900" indent="-342900">
+              <a:spcAft>
+                <a:spcPts val="800"/>
+              </a:spcAft>
+              <a:buSzPct val="100000"/>
+              <a:buChar char="•"/>
+            </a:pPr>
+            <a:r>
+              <a:rPr lang="en-US" sz="2000" dirty="0">
+                <a:solidFill>
+                  <a:srgbClr val="111111"/>
+                </a:solidFill>
+                <a:latin typeface="Calibri" pitchFamily="34" charset="0"/>
+                <a:ea typeface="Calibri" pitchFamily="34" charset="-122"/>
+                <a:cs typeface="Calibri" pitchFamily="34" charset="-120"/>
+              </a:rPr>
+              <a:t>Without the projector (Activity 1): write the formula.</a:t>
+            </a:r>
+            <a:endParaRPr lang="en-US" sz="2000" dirty="0"/>
+          </a:p>
+          <a:p>
+            <a:pPr algn="l" marL="342900" indent="-342900">
+              <a:spcAft>
+                <a:spcPts val="800"/>
+              </a:spcAft>
+              <a:buSzPct val="100000"/>
+              <a:buChar char="•"/>
+            </a:pPr>
+            <a:r>
+              <a:rPr lang="en-US" sz="2000" dirty="0">
+                <a:solidFill>
+                  <a:srgbClr val="111111"/>
+                </a:solidFill>
+                <a:latin typeface="Calibri" pitchFamily="34" charset="0"/>
+                <a:ea typeface="Calibri" pitchFamily="34" charset="-122"/>
+                <a:cs typeface="Calibri" pitchFamily="34" charset="-120"/>
+              </a:rPr>
+              <a:t>Without the projector (Activity 2): work it out on the board.</a:t>
+            </a:r>
+            <a:endParaRPr lang="en-US" sz="2000" dirty="0"/>
+          </a:p>
+          <a:p>
+            <a:pPr algn="l" marL="342900" indent="-342900">
+              <a:spcAft>
+                <a:spcPts val="800"/>
+              </a:spcAft>
+              <a:buSzPct val="100000"/>
+              <a:buChar char="•"/>
+            </a:pPr>
+            <a:r>
+              <a:rPr lang="en-US" sz="2000" dirty="0">
+                <a:solidFill>
+                  <a:srgbClr val="111111"/>
+                </a:solidFill>
+                <a:latin typeface="Calibri" pitchFamily="34" charset="0"/>
+                <a:ea typeface="Calibri" pitchFamily="34" charset="-122"/>
+                <a:cs typeface="Calibri" pitchFamily="34" charset="-120"/>
+              </a:rPr>
+              <a:t>Without the projector (Activity 3): work it out on the board.</a:t>
+            </a:r>
+            <a:endParaRPr lang="en-US" sz="2000" dirty="0"/>
+          </a:p>
+          <a:p>
+            <a:pPr algn="l" marL="342900" indent="-342900">
+              <a:spcAft>
+                <a:spcPts val="800"/>
+              </a:spcAft>
+              <a:buSzPct val="100000"/>
+              <a:buChar char="•"/>
+            </a:pPr>
+            <a:r>
+              <a:rPr lang="en-US" sz="2000" dirty="0">
+                <a:solidFill>
+                  <a:srgbClr val="111111"/>
+                </a:solidFill>
+                <a:latin typeface="Calibri" pitchFamily="34" charset="0"/>
+                <a:ea typeface="Calibri" pitchFamily="34" charset="-122"/>
+                <a:cs typeface="Calibri" pitchFamily="34" charset="-120"/>
+              </a:rPr>
+              <a:t>Without the projector (Activity 4): shade a map of the regions.</a:t>
+            </a:r>
+            <a:endParaRPr lang="en-US" sz="2000" dirty="0"/>
+          </a:p>
+          <a:p>
+            <a:pPr algn="l" marL="342900" indent="-342900">
+              <a:spcAft>
+                <a:spcPts val="800"/>
+              </a:spcAft>
+              <a:buSzPct val="100000"/>
+              <a:buChar char="•"/>
+            </a:pPr>
+            <a:r>
+              <a:rPr lang="en-US" sz="2000" dirty="0">
+                <a:solidFill>
+                  <a:srgbClr val="111111"/>
+                </a:solidFill>
+                <a:latin typeface="Calibri" pitchFamily="34" charset="0"/>
+                <a:ea typeface="Calibri" pitchFamily="34" charset="-122"/>
+                <a:cs typeface="Calibri" pitchFamily="34" charset="-120"/>
+              </a:rPr>
+              <a:t>Without the projector (Activity 5): discuss the West Region.</a:t>
+            </a:r>
+            <a:endParaRPr lang="en-US" sz="2000" dirty="0"/>
+          </a:p>
+        </p:txBody>
+      </p:sp>
+      <p:sp>
+        <p:nvSpPr>
+          <p:cNvPr id="25" name="Slide Number Placeholder 0"/>
+          <p:cNvSpPr>
+            <a:spLocks noGrp="1"/>
+          </p:cNvSpPr>
+          <p:nvPr>
+            <p:ph type="sldNum" sz="quarter" idx="4294967295"/>
+          </p:nvPr>
+        </p:nvSpPr>
+        <p:spPr>
+          <a:xfrm>
+            <a:off x="27432" y="91440"/>
+            <a:ext cx="585216" cy="475488"/>
+          </a:xfrm>
+          <a:prstGeom prst="rect">
+            <a:avLst/>
+          </a:prstGeom>
+          <a:extLst>
+            <a:ext uri="{C572A759-6A51-4108-AA02-DFA0A04FC94B}">
+              <ma14:wrappingTextBoxFlag xmlns:ma14="http://schemas.microsoft.com/office/mac/drawingml/2011/main" val="0"/>
+            </a:ext>
+          </a:extLst>
+        </p:spPr>
+        <p:txBody>
+          <a:bodyPr/>
+          <a:lstStyle>
+            <a:lvl1pPr>
+              <a:defRPr sz="2000">
+                <a:solidFill>
+                  <a:srgbClr val="FFFFFF"/>
+                </a:solidFill>
+                <a:latin typeface="Calibri"/>
+                <a:ea typeface="Calibri"/>
+                <a:cs typeface="Calibri"/>
+              </a:defRPr>
+            </a:lvl1pPr>
+          </a:lstStyle>
+          <a:p>
+            <a:pPr algn="ctr"/>
+            <a:fld id="{F7021451-1387-4CA6-816F-3879F97B5CBC}" type="slidenum">
+              <a:rPr b="1" lang="en-US"/>
               <a:t>50</a:t>
             </a:fld>
             <a:endParaRPr lang="en-US"/>
@@ -19848,7 +19985,7 @@
                 <a:ea typeface="Calibri" pitchFamily="34" charset="-122"/>
                 <a:cs typeface="Calibri" pitchFamily="34" charset="-120"/>
               </a:rPr>
-              <a:t>TEACHER'S NOTE</a:t>
+              <a:t>REFERENCES</a:t>
             </a:r>
             <a:endParaRPr lang="en-US" sz="1400" dirty="0"/>
           </a:p>
@@ -19871,7 +20008,7 @@
         <p:spPr>
           <a:xfrm>
             <a:off x="0" y="658368"/>
-            <a:ext cx="3840480" cy="5833872"/>
+            <a:ext cx="5120640" cy="5833872"/>
           </a:xfrm>
           <a:prstGeom prst="rect">
             <a:avLst/>
@@ -19886,8 +20023,8 @@
         </p:nvSpPr>
         <p:spPr>
           <a:xfrm>
-            <a:off x="4069080" y="1005840"/>
-            <a:ext cx="7802575" cy="731520"/>
+            <a:off x="5349240" y="1005840"/>
+            <a:ext cx="6522415" cy="731520"/>
           </a:xfrm>
           <a:prstGeom prst="rect">
             <a:avLst/>
@@ -19913,7 +20050,7 @@
                 <a:ea typeface="Times New Roman" pitchFamily="34" charset="-122"/>
                 <a:cs typeface="Times New Roman" pitchFamily="34" charset="-120"/>
               </a:rPr>
-              <a:t>Teacher's Note</a:t>
+              <a:t>References</a:t>
             </a:r>
             <a:endParaRPr lang="en-US" sz="3600" dirty="0"/>
           </a:p>
@@ -19927,8 +20064,8 @@
         </p:nvSpPr>
         <p:spPr>
           <a:xfrm>
-            <a:off x="4069080" y="1783080"/>
-            <a:ext cx="7802575" cy="4663440"/>
+            <a:off x="5349240" y="1783080"/>
+            <a:ext cx="6522415" cy="4663440"/>
           </a:xfrm>
           <a:prstGeom prst="rect">
             <a:avLst/>
@@ -19948,7 +20085,7 @@
               <a:buChar char="•"/>
             </a:pPr>
             <a:r>
-              <a:rPr lang="en-US" sz="2000" dirty="0">
+              <a:rPr lang="en-US" sz="1800" dirty="0">
                 <a:solidFill>
                   <a:srgbClr val="111111"/>
                 </a:solidFill>
@@ -19956,9 +20093,9 @@
                 <a:ea typeface="Calibri" pitchFamily="34" charset="-122"/>
                 <a:cs typeface="Calibri" pitchFamily="34" charset="-120"/>
               </a:rPr>
-              <a:t>Timing: Homework correction, plan, objectives 8 min | Recall, situation, action 10 min | 5 activities 30 min | Board summary (copying) 30 min | Evaluation, remediation 10 min | Homework, next lesson 5 min | Logbook 7 min</a:t>
-            </a:r>
-            <a:endParaRPr lang="en-US" sz="2000" dirty="0"/>
+              <a:t>Geography Syllabus, Forms I–V, MINESEC (2023) — Form 2, Module 1: Man in his Environment.</a:t>
+            </a:r>
+            <a:endParaRPr lang="en-US" sz="1800" dirty="0"/>
           </a:p>
           <a:p>
             <a:pPr algn="l" marL="342900" indent="-342900">
@@ -19969,7 +20106,7 @@
               <a:buChar char="•"/>
             </a:pPr>
             <a:r>
-              <a:rPr lang="en-US" sz="2000" dirty="0">
+              <a:rPr lang="en-US" sz="1800" dirty="0">
                 <a:solidFill>
                   <a:srgbClr val="111111"/>
                 </a:solidFill>
@@ -19977,9 +20114,9 @@
                 <a:ea typeface="Calibri" pitchFamily="34" charset="-122"/>
                 <a:cs typeface="Calibri" pitchFamily="34" charset="-120"/>
               </a:rPr>
-              <a:t>Without the projector (Activity 1): write the formula.</a:t>
-            </a:r>
-            <a:endParaRPr lang="en-US" sz="2000" dirty="0"/>
+              <a:t>Photo, Activity 5: “Bandjoun's chefferie: I - the approach past the royal quarters” by 10b travelling / Carsten ten Brink, CC BY-NC-ND 2.0, via Flickr (https://www.flickr.com/photos/77334245@N00/7326237514)</a:t>
+            </a:r>
+            <a:endParaRPr lang="en-US" sz="1800" dirty="0"/>
           </a:p>
           <a:p>
             <a:pPr algn="l" marL="342900" indent="-342900">
@@ -19990,7 +20127,7 @@
               <a:buChar char="•"/>
             </a:pPr>
             <a:r>
-              <a:rPr lang="en-US" sz="2000" dirty="0">
+              <a:rPr lang="en-US" sz="1800" dirty="0">
                 <a:solidFill>
                   <a:srgbClr val="111111"/>
                 </a:solidFill>
@@ -19998,72 +20135,9 @@
                 <a:ea typeface="Calibri" pitchFamily="34" charset="-122"/>
                 <a:cs typeface="Calibri" pitchFamily="34" charset="-120"/>
               </a:rPr>
-              <a:t>Without the projector (Activity 2): work it out on the board.</a:t>
-            </a:r>
-            <a:endParaRPr lang="en-US" sz="2000" dirty="0"/>
-          </a:p>
-          <a:p>
-            <a:pPr algn="l" marL="342900" indent="-342900">
-              <a:spcAft>
-                <a:spcPts val="800"/>
-              </a:spcAft>
-              <a:buSzPct val="100000"/>
-              <a:buChar char="•"/>
-            </a:pPr>
-            <a:r>
-              <a:rPr lang="en-US" sz="2000" dirty="0">
-                <a:solidFill>
-                  <a:srgbClr val="111111"/>
-                </a:solidFill>
-                <a:latin typeface="Calibri" pitchFamily="34" charset="0"/>
-                <a:ea typeface="Calibri" pitchFamily="34" charset="-122"/>
-                <a:cs typeface="Calibri" pitchFamily="34" charset="-120"/>
-              </a:rPr>
-              <a:t>Without the projector (Activity 3): work it out on the board.</a:t>
-            </a:r>
-            <a:endParaRPr lang="en-US" sz="2000" dirty="0"/>
-          </a:p>
-          <a:p>
-            <a:pPr algn="l" marL="342900" indent="-342900">
-              <a:spcAft>
-                <a:spcPts val="800"/>
-              </a:spcAft>
-              <a:buSzPct val="100000"/>
-              <a:buChar char="•"/>
-            </a:pPr>
-            <a:r>
-              <a:rPr lang="en-US" sz="2000" dirty="0">
-                <a:solidFill>
-                  <a:srgbClr val="111111"/>
-                </a:solidFill>
-                <a:latin typeface="Calibri" pitchFamily="34" charset="0"/>
-                <a:ea typeface="Calibri" pitchFamily="34" charset="-122"/>
-                <a:cs typeface="Calibri" pitchFamily="34" charset="-120"/>
-              </a:rPr>
-              <a:t>Without the projector (Activity 4): shade a map of the regions.</a:t>
-            </a:r>
-            <a:endParaRPr lang="en-US" sz="2000" dirty="0"/>
-          </a:p>
-          <a:p>
-            <a:pPr algn="l" marL="342900" indent="-342900">
-              <a:spcAft>
-                <a:spcPts val="800"/>
-              </a:spcAft>
-              <a:buSzPct val="100000"/>
-              <a:buChar char="•"/>
-            </a:pPr>
-            <a:r>
-              <a:rPr lang="en-US" sz="2000" dirty="0">
-                <a:solidFill>
-                  <a:srgbClr val="111111"/>
-                </a:solidFill>
-                <a:latin typeface="Calibri" pitchFamily="34" charset="0"/>
-                <a:ea typeface="Calibri" pitchFamily="34" charset="-122"/>
-                <a:cs typeface="Calibri" pitchFamily="34" charset="-120"/>
-              </a:rPr>
-              <a:t>Without the projector (Activity 5): discuss the West Region.</a:t>
-            </a:r>
-            <a:endParaRPr lang="en-US" sz="2000" dirty="0"/>
+              <a:t>Diagrams and animations: drawn for this lesson (Geography Department).</a:t>
+            </a:r>
+            <a:endParaRPr lang="en-US" sz="1800" dirty="0"/>
           </a:p>
         </p:txBody>
       </p:sp>
@@ -20110,268 +20184,6 @@
             <a:fld id="{F7021451-1387-4CA6-816F-3879F97B5CBC}" type="slidenum">
               <a:rPr b="1" lang="en-US"/>
               <a:t>51</a:t>
-            </a:fld>
-            <a:endParaRPr lang="en-US"/>
-          </a:p>
-        </p:txBody>
-      </p:sp>
-    </p:spTree>
-  </p:cSld>
-  <p:clrMapOvr>
-    <a:masterClrMapping/>
-  </p:clrMapOvr>
-</p:sld>
-</file>
-
-<file path=ppt/slides/slide52.xml><?xml version="1.0" encoding="utf-8"?>
-<p:sld xmlns:a="http://schemas.openxmlformats.org/drawingml/2006/main" xmlns:r="http://schemas.openxmlformats.org/officeDocument/2006/relationships" xmlns:p="http://schemas.openxmlformats.org/presentationml/2006/main">
-  <p:cSld name="Slide 52">
-    <p:spTree>
-      <p:nvGrpSpPr>
-        <p:cNvPr id="1" name=""/>
-        <p:cNvGrpSpPr/>
-        <p:nvPr/>
-      </p:nvGrpSpPr>
-      <p:grpSpPr>
-        <a:xfrm>
-          <a:off x="0" y="0"/>
-          <a:ext cx="0" cy="0"/>
-          <a:chOff x="0" y="0"/>
-          <a:chExt cx="0" cy="0"/>
-        </a:xfrm>
-      </p:grpSpPr>
-      <p:sp>
-        <p:nvSpPr>
-          <p:cNvPr id="2" name="Text 0"/>
-          <p:cNvSpPr/>
-          <p:nvPr/>
-        </p:nvSpPr>
-        <p:spPr>
-          <a:xfrm>
-            <a:off x="457200" y="713232"/>
-            <a:ext cx="11368735" cy="274320"/>
-          </a:xfrm>
-          <a:prstGeom prst="rect">
-            <a:avLst/>
-          </a:prstGeom>
-          <a:noFill/>
-          <a:ln/>
-        </p:spPr>
-        <p:txBody>
-          <a:bodyPr wrap="square" lIns="0" tIns="0" rIns="0" bIns="0" rtlCol="0" anchor="ctr"/>
-          <a:lstStyle/>
-          <a:p>
-            <a:pPr algn="r" indent="0" marL="0">
-              <a:buNone/>
-            </a:pPr>
-            <a:r>
-              <a:rPr lang="en-US" sz="1400" b="1" dirty="0">
-                <a:solidFill>
-                  <a:srgbClr val="1C3F6E"/>
-                </a:solidFill>
-                <a:latin typeface="Calibri" pitchFamily="34" charset="0"/>
-                <a:ea typeface="Calibri" pitchFamily="34" charset="-122"/>
-                <a:cs typeface="Calibri" pitchFamily="34" charset="-120"/>
-              </a:rPr>
-              <a:t>REFERENCES</a:t>
-            </a:r>
-            <a:endParaRPr lang="en-US" sz="1400" dirty="0"/>
-          </a:p>
-        </p:txBody>
-      </p:sp>
-      <p:pic>
-        <p:nvPicPr>
-          <p:cNvPr id="3" name="Image 0" descr="/home/claude/f4/img/minesec_sheet.png">    </p:cNvPr>
-          <p:cNvPicPr>
-            <a:picLocks noChangeAspect="1"/>
-          </p:cNvPicPr>
-          <p:nvPr/>
-        </p:nvPicPr>
-        <p:blipFill>
-          <a:blip r:embed="rId1"/>
-          <a:stretch>
-            <a:fillRect/>
-          </a:stretch>
-        </p:blipFill>
-        <p:spPr>
-          <a:xfrm>
-            <a:off x="0" y="658368"/>
-            <a:ext cx="5120640" cy="5833872"/>
-          </a:xfrm>
-          <a:prstGeom prst="rect">
-            <a:avLst/>
-          </a:prstGeom>
-        </p:spPr>
-      </p:pic>
-      <p:sp>
-        <p:nvSpPr>
-          <p:cNvPr id="4" name="Text 1"/>
-          <p:cNvSpPr/>
-          <p:nvPr/>
-        </p:nvSpPr>
-        <p:spPr>
-          <a:xfrm>
-            <a:off x="5349240" y="1005840"/>
-            <a:ext cx="6522415" cy="731520"/>
-          </a:xfrm>
-          <a:prstGeom prst="rect">
-            <a:avLst/>
-          </a:prstGeom>
-          <a:noFill/>
-          <a:ln/>
-        </p:spPr>
-        <p:txBody>
-          <a:bodyPr wrap="square" lIns="0" tIns="0" rIns="0" bIns="0" rtlCol="0" anchor="ctr">
-            <a:normAutofit/>
-          </a:bodyPr>
-          <a:lstStyle/>
-          <a:p>
-            <a:pPr algn="ctr" indent="0" marL="0">
-              <a:buNone/>
-            </a:pPr>
-            <a:r>
-              <a:rPr lang="en-US" sz="3600" b="1" dirty="0">
-                <a:solidFill>
-                  <a:srgbClr val="990011"/>
-                </a:solidFill>
-                <a:latin typeface="Times New Roman" pitchFamily="34" charset="0"/>
-                <a:ea typeface="Times New Roman" pitchFamily="34" charset="-122"/>
-                <a:cs typeface="Times New Roman" pitchFamily="34" charset="-120"/>
-              </a:rPr>
-              <a:t>References</a:t>
-            </a:r>
-            <a:endParaRPr lang="en-US" sz="3600" dirty="0"/>
-          </a:p>
-        </p:txBody>
-      </p:sp>
-      <p:sp>
-        <p:nvSpPr>
-          <p:cNvPr id="5" name="Text 2"/>
-          <p:cNvSpPr/>
-          <p:nvPr/>
-        </p:nvSpPr>
-        <p:spPr>
-          <a:xfrm>
-            <a:off x="5349240" y="1783080"/>
-            <a:ext cx="6522415" cy="4663440"/>
-          </a:xfrm>
-          <a:prstGeom prst="rect">
-            <a:avLst/>
-          </a:prstGeom>
-          <a:noFill/>
-          <a:ln/>
-        </p:spPr>
-        <p:txBody>
-          <a:bodyPr wrap="square" lIns="0" tIns="0" rIns="0" bIns="0" rtlCol="0" anchor="t"/>
-          <a:lstStyle/>
-          <a:p>
-            <a:pPr algn="l" marL="342900" indent="-342900">
-              <a:spcAft>
-                <a:spcPts val="800"/>
-              </a:spcAft>
-              <a:buSzPct val="100000"/>
-              <a:buChar char="•"/>
-            </a:pPr>
-            <a:r>
-              <a:rPr lang="en-US" sz="1800" dirty="0">
-                <a:solidFill>
-                  <a:srgbClr val="111111"/>
-                </a:solidFill>
-                <a:latin typeface="Calibri" pitchFamily="34" charset="0"/>
-                <a:ea typeface="Calibri" pitchFamily="34" charset="-122"/>
-                <a:cs typeface="Calibri" pitchFamily="34" charset="-120"/>
-              </a:rPr>
-              <a:t>Geography Syllabus, Forms I–V, MINESEC (2023) — Form 2, Module 1: Man in his Environment.</a:t>
-            </a:r>
-            <a:endParaRPr lang="en-US" sz="1800" dirty="0"/>
-          </a:p>
-          <a:p>
-            <a:pPr algn="l" marL="342900" indent="-342900">
-              <a:spcAft>
-                <a:spcPts val="800"/>
-              </a:spcAft>
-              <a:buSzPct val="100000"/>
-              <a:buChar char="•"/>
-            </a:pPr>
-            <a:r>
-              <a:rPr lang="en-US" sz="1800" dirty="0">
-                <a:solidFill>
-                  <a:srgbClr val="111111"/>
-                </a:solidFill>
-                <a:latin typeface="Calibri" pitchFamily="34" charset="0"/>
-                <a:ea typeface="Calibri" pitchFamily="34" charset="-122"/>
-                <a:cs typeface="Calibri" pitchFamily="34" charset="-120"/>
-              </a:rPr>
-              <a:t>Photo, Activity 5: “Bandjoun's chefferie: I - the approach past the royal quarters” by 10b travelling / Carsten ten Brink, CC BY-NC-ND 2.0, via Flickr (https://www.flickr.com/photos/77334245@N00/7326237514)</a:t>
-            </a:r>
-            <a:endParaRPr lang="en-US" sz="1800" dirty="0"/>
-          </a:p>
-          <a:p>
-            <a:pPr algn="l" marL="342900" indent="-342900">
-              <a:spcAft>
-                <a:spcPts val="800"/>
-              </a:spcAft>
-              <a:buSzPct val="100000"/>
-              <a:buChar char="•"/>
-            </a:pPr>
-            <a:r>
-              <a:rPr lang="en-US" sz="1800" dirty="0">
-                <a:solidFill>
-                  <a:srgbClr val="111111"/>
-                </a:solidFill>
-                <a:latin typeface="Calibri" pitchFamily="34" charset="0"/>
-                <a:ea typeface="Calibri" pitchFamily="34" charset="-122"/>
-                <a:cs typeface="Calibri" pitchFamily="34" charset="-120"/>
-              </a:rPr>
-              <a:t>Diagrams and animations: drawn for this lesson (Geography Department).</a:t>
-            </a:r>
-            <a:endParaRPr lang="en-US" sz="1800" dirty="0"/>
-          </a:p>
-        </p:txBody>
-      </p:sp>
-      <p:sp>
-        <p:nvSpPr>
-          <p:cNvPr id="25" name="Slide Number Placeholder 0"/>
-          <p:cNvSpPr>
-            <a:spLocks noGrp="1"/>
-          </p:cNvSpPr>
-          <p:nvPr>
-            <p:ph type="sldNum" sz="quarter" idx="4294967295"/>
-          </p:nvPr>
-        </p:nvSpPr>
-        <p:spPr>
-          <a:xfrm>
-            <a:off x="27432" y="91440"/>
-            <a:ext cx="585216" cy="475488"/>
-          </a:xfrm>
-          <a:prstGeom prst="rect">
-            <a:avLst/>
-          </a:prstGeom>
-          <a:extLst>
-            <a:ext uri="{C572A759-6A51-4108-AA02-DFA0A04FC94B}">
-              <ma14:wrappingTextBoxFlag xmlns:ma14="http://schemas.microsoft.com/office/mac/drawingml/2011/main" val="0"/>
-            </a:ext>
-          </a:extLst>
-        </p:spPr>
-        <p:txBody>
-          <a:bodyPr/>
-          <a:lstStyle>
-            <a:lvl1pPr>
-              <a:defRPr sz="2000">
-                <a:solidFill>
-                  <a:srgbClr val="FFFFFF"/>
-                </a:solidFill>
-                <a:latin typeface="Calibri"/>
-                <a:ea typeface="Calibri"/>
-                <a:cs typeface="Calibri"/>
-              </a:defRPr>
-            </a:lvl1pPr>
-          </a:lstStyle>
-          <a:p>
-            <a:pPr algn="ctr"/>
-            <a:fld id="{F7021451-1387-4CA6-816F-3879F97B5CBC}" type="slidenum">
-              <a:rPr b="1" lang="en-US"/>
-              <a:t>52</a:t>
             </a:fld>
             <a:endParaRPr lang="en-US"/>
           </a:p>
@@ -20917,7 +20729,7 @@
                 <a:ea typeface="Times New Roman" pitchFamily="34" charset="-122"/>
                 <a:cs typeface="Times New Roman" pitchFamily="34" charset="-120"/>
               </a:rPr>
-              <a:t>Calculate the density of regions of Cameroon.</a:t>
+              <a:t>Calculate the density of the regions of Cameroon.</a:t>
             </a:r>
             <a:endParaRPr lang="en-US" sz="4000" dirty="0"/>
           </a:p>

--- a/lecons/F2/04_F2_M1_PW02_Population_Densities_in_Cameroon.pptx
+++ b/lecons/F2/04_F2_M1_PW02_Population_Densities_in_Cameroon.pptx
@@ -3456,7 +3456,7 @@
           <a:p>
             <a:r>
               <a:rPr lang="en-US" dirty="0"/>
-              <a:t>Before we start the new lesson, let us correct the homework I gave you at the end of Lesson 2: The Uneven Distribution of the World's Population. The question was: Find the population and the area of your region and calculate its density. Take out your exercise books.</a:t>
+              <a:t>Before we start the new lesson, let us correct the homework I gave you at the end of Lesson 2: The Uneven Distribution of the World's Population. The question was: Calculate the density of the Littoral: 3,850,000 people on 20,248 km². Take out your exercise books.</a:t>
             </a:r>
             <a:endParaRPr lang="en-US" dirty="0"/>
           </a:p>
@@ -3984,7 +3984,7 @@
           <a:p>
             <a:r>
               <a:rPr lang="en-US" dirty="0"/>
-              <a:t>For your homework: Calculate the density of the Far North: about 4,450,000 people on 34,263 km². We shall correct it at the beginning of our next lesson.</a:t>
+              <a:t>For your homework: Name the natural zone that covers southern Cameroon. We shall correct it at the beginning of our next lesson.</a:t>
             </a:r>
             <a:endParaRPr lang="en-US" dirty="0"/>
           </a:p>
@@ -4424,7 +4424,7 @@
           <a:p>
             <a:r>
               <a:rPr lang="en-US" dirty="0"/>
-              <a:t>Here is a good answer. Example for the North Region: about 2,800,000 people ÷ 66,000 km² ≈ 42 people per km². Compare it with your own answer and correct your work in red.</a:t>
+              <a:t>Here is a good answer. 3,850,000 ÷ 20,248 ≈ 190 people per km². Compare it with your own answer and correct your work in red.</a:t>
             </a:r>
             <a:endParaRPr lang="en-US" dirty="0"/>
           </a:p>
@@ -14959,7 +14959,7 @@
                 <a:ea typeface="Times New Roman" pitchFamily="34" charset="-122"/>
                 <a:cs typeface="Times New Roman" pitchFamily="34" charset="-120"/>
               </a:rPr>
-              <a:t>Find the population and the area of your region and calculate its density.</a:t>
+              <a:t>Calculate the density of the Littoral: 3,850,000 people on 20,248 km².</a:t>
             </a:r>
             <a:endParaRPr lang="en-US" sz="4000" dirty="0"/>
           </a:p>
@@ -16339,7 +16339,7 @@
                 <a:ea typeface="Times New Roman" pitchFamily="34" charset="-122"/>
                 <a:cs typeface="Times New Roman" pitchFamily="34" charset="-120"/>
               </a:rPr>
-              <a:t>Calculate the density of the Far North: about 4,450,000 people on 34,263 km².</a:t>
+              <a:t>Name the natural zone that covers southern Cameroon.</a:t>
             </a:r>
             <a:endParaRPr lang="en-US" sz="4000" dirty="0"/>
           </a:p>
@@ -19003,7 +19003,7 @@
                           <a:ea typeface="Calibri" pitchFamily="34" charset="-122"/>
                           <a:cs typeface="Calibri" pitchFamily="34" charset="-120"/>
                         </a:rPr>
-                        <a:t>Calculate the density of the Far North: about 4,450,000 people on 34,263 km².</a:t>
+                        <a:t>Name the natural zone that covers southern Cameroon.</a:t>
                       </a:r>
                       <a:endParaRPr lang="en-US" sz="1600" dirty="0">
                         <a:latin typeface="Calibri" charset="0"/>
@@ -19548,7 +19548,7 @@
                 <a:ea typeface="Times New Roman" pitchFamily="34" charset="-122"/>
                 <a:cs typeface="Times New Roman" pitchFamily="34" charset="-120"/>
               </a:rPr>
-              <a:t>Example for the North Region: about 2,800,000 people ÷ 66,000 km² ≈ 42 people per km².</a:t>
+              <a:t>3,850,000 ÷ 20,248 ≈ 190 people per km².</a:t>
             </a:r>
             <a:endParaRPr lang="en-US" sz="4000" dirty="0"/>
           </a:p>
